--- a/BCHAIN-ACCESS_Package/images/Figure_3.pptx
+++ b/BCHAIN-ACCESS_Package/images/Figure_3.pptx
@@ -5,9 +5,9 @@
     <p:sldMasterId id="2147483648" r:id="rId1"/>
   </p:sldMasterIdLst>
   <p:sldIdLst>
-    <p:sldId id="256" r:id="rId7"/>
+    <p:sldId id="256" r:id="rId2"/>
   </p:sldIdLst>
-  <p:sldSz cx="12191695" cy="7162620" type="screen4x3"/>
+  <p:sldSz cx="12192000" cy="7772400"/>
   <p:notesSz cx="6858000" cy="9144000"/>
   <p:defaultTextStyle>
     <a:defPPr>
@@ -104,6 +104,22 @@
       </a:defRPr>
     </a:lvl9pPr>
   </p:defaultTextStyle>
+  <p:extLst>
+    <p:ext uri="{EFAFB233-063F-42B5-8137-9DF3F51BA10A}">
+      <p15:sldGuideLst xmlns:p15="http://schemas.microsoft.com/office/powerpoint/2012/main">
+        <p15:guide id="1" orient="horz" pos="2160">
+          <p15:clr>
+            <a:srgbClr val="A4A3A4"/>
+          </p15:clr>
+        </p15:guide>
+        <p15:guide id="2" pos="2880">
+          <p15:clr>
+            <a:srgbClr val="A4A3A4"/>
+          </p15:clr>
+        </p15:guide>
+      </p15:sldGuideLst>
+    </p:ext>
+  </p:extLst>
 </p:presentation>
 </file>
 
@@ -145,10 +161,9 @@
           <a:lstStyle/>
           <a:p>
             <a:r>
-              <a:rPr lang="en-US" smtClean="0"/>
+              <a:rPr lang="en-US"/>
               <a:t>Click to edit Master title style</a:t>
             </a:r>
-            <a:endParaRPr lang="en-US"/>
           </a:p>
         </p:txBody>
       </p:sp>
@@ -264,10 +279,9 @@
           </a:lstStyle>
           <a:p>
             <a:r>
-              <a:rPr lang="en-US" smtClean="0"/>
+              <a:rPr lang="en-US"/>
               <a:t>Click to edit Master subtitle style</a:t>
             </a:r>
-            <a:endParaRPr lang="en-US"/>
           </a:p>
         </p:txBody>
       </p:sp>
@@ -288,7 +302,7 @@
           <a:p>
             <a:fld id="{5BCAD085-E8A6-8845-BD4E-CB4CCA059FC4}" type="datetimeFigureOut">
               <a:rPr lang="en-US" smtClean="0"/>
-              <a:t>1/27/13</a:t>
+              <a:t>7/13/2026</a:t>
             </a:fld>
             <a:endParaRPr lang="en-US"/>
           </a:p>
@@ -382,10 +396,9 @@
           <a:lstStyle/>
           <a:p>
             <a:r>
-              <a:rPr lang="en-US" smtClean="0"/>
+              <a:rPr lang="en-US"/>
               <a:t>Click to edit Master title style</a:t>
             </a:r>
-            <a:endParaRPr lang="en-US"/>
           </a:p>
         </p:txBody>
       </p:sp>
@@ -406,38 +419,37 @@
           <a:p>
             <a:pPr lvl="0"/>
             <a:r>
-              <a:rPr lang="en-US" smtClean="0"/>
+              <a:rPr lang="en-US"/>
               <a:t>Click to edit Master text styles</a:t>
             </a:r>
           </a:p>
           <a:p>
             <a:pPr lvl="1"/>
             <a:r>
-              <a:rPr lang="en-US" smtClean="0"/>
+              <a:rPr lang="en-US"/>
               <a:t>Second level</a:t>
             </a:r>
           </a:p>
           <a:p>
             <a:pPr lvl="2"/>
             <a:r>
-              <a:rPr lang="en-US" smtClean="0"/>
+              <a:rPr lang="en-US"/>
               <a:t>Third level</a:t>
             </a:r>
           </a:p>
           <a:p>
             <a:pPr lvl="3"/>
             <a:r>
-              <a:rPr lang="en-US" smtClean="0"/>
+              <a:rPr lang="en-US"/>
               <a:t>Fourth level</a:t>
             </a:r>
           </a:p>
           <a:p>
             <a:pPr lvl="4"/>
             <a:r>
-              <a:rPr lang="en-US" smtClean="0"/>
+              <a:rPr lang="en-US"/>
               <a:t>Fifth level</a:t>
             </a:r>
-            <a:endParaRPr lang="en-US"/>
           </a:p>
         </p:txBody>
       </p:sp>
@@ -458,7 +470,7 @@
           <a:p>
             <a:fld id="{5BCAD085-E8A6-8845-BD4E-CB4CCA059FC4}" type="datetimeFigureOut">
               <a:rPr lang="en-US" smtClean="0"/>
-              <a:t>1/27/13</a:t>
+              <a:t>7/13/2026</a:t>
             </a:fld>
             <a:endParaRPr lang="en-US"/>
           </a:p>
@@ -557,10 +569,9 @@
           <a:lstStyle/>
           <a:p>
             <a:r>
-              <a:rPr lang="en-US" smtClean="0"/>
+              <a:rPr lang="en-US"/>
               <a:t>Click to edit Master title style</a:t>
             </a:r>
-            <a:endParaRPr lang="en-US"/>
           </a:p>
         </p:txBody>
       </p:sp>
@@ -586,38 +597,37 @@
           <a:p>
             <a:pPr lvl="0"/>
             <a:r>
-              <a:rPr lang="en-US" smtClean="0"/>
+              <a:rPr lang="en-US"/>
               <a:t>Click to edit Master text styles</a:t>
             </a:r>
           </a:p>
           <a:p>
             <a:pPr lvl="1"/>
             <a:r>
-              <a:rPr lang="en-US" smtClean="0"/>
+              <a:rPr lang="en-US"/>
               <a:t>Second level</a:t>
             </a:r>
           </a:p>
           <a:p>
             <a:pPr lvl="2"/>
             <a:r>
-              <a:rPr lang="en-US" smtClean="0"/>
+              <a:rPr lang="en-US"/>
               <a:t>Third level</a:t>
             </a:r>
           </a:p>
           <a:p>
             <a:pPr lvl="3"/>
             <a:r>
-              <a:rPr lang="en-US" smtClean="0"/>
+              <a:rPr lang="en-US"/>
               <a:t>Fourth level</a:t>
             </a:r>
           </a:p>
           <a:p>
             <a:pPr lvl="4"/>
             <a:r>
-              <a:rPr lang="en-US" smtClean="0"/>
+              <a:rPr lang="en-US"/>
               <a:t>Fifth level</a:t>
             </a:r>
-            <a:endParaRPr lang="en-US"/>
           </a:p>
         </p:txBody>
       </p:sp>
@@ -638,7 +648,7 @@
           <a:p>
             <a:fld id="{5BCAD085-E8A6-8845-BD4E-CB4CCA059FC4}" type="datetimeFigureOut">
               <a:rPr lang="en-US" smtClean="0"/>
-              <a:t>1/27/13</a:t>
+              <a:t>7/13/2026</a:t>
             </a:fld>
             <a:endParaRPr lang="en-US"/>
           </a:p>
@@ -732,10 +742,9 @@
           <a:lstStyle/>
           <a:p>
             <a:r>
-              <a:rPr lang="en-US" smtClean="0"/>
+              <a:rPr lang="en-US"/>
               <a:t>Click to edit Master title style</a:t>
             </a:r>
-            <a:endParaRPr lang="en-US"/>
           </a:p>
         </p:txBody>
       </p:sp>
@@ -756,38 +765,37 @@
           <a:p>
             <a:pPr lvl="0"/>
             <a:r>
-              <a:rPr lang="en-US" smtClean="0"/>
+              <a:rPr lang="en-US"/>
               <a:t>Click to edit Master text styles</a:t>
             </a:r>
           </a:p>
           <a:p>
             <a:pPr lvl="1"/>
             <a:r>
-              <a:rPr lang="en-US" smtClean="0"/>
+              <a:rPr lang="en-US"/>
               <a:t>Second level</a:t>
             </a:r>
           </a:p>
           <a:p>
             <a:pPr lvl="2"/>
             <a:r>
-              <a:rPr lang="en-US" smtClean="0"/>
+              <a:rPr lang="en-US"/>
               <a:t>Third level</a:t>
             </a:r>
           </a:p>
           <a:p>
             <a:pPr lvl="3"/>
             <a:r>
-              <a:rPr lang="en-US" smtClean="0"/>
+              <a:rPr lang="en-US"/>
               <a:t>Fourth level</a:t>
             </a:r>
           </a:p>
           <a:p>
             <a:pPr lvl="4"/>
             <a:r>
-              <a:rPr lang="en-US" smtClean="0"/>
+              <a:rPr lang="en-US"/>
               <a:t>Fifth level</a:t>
             </a:r>
-            <a:endParaRPr lang="en-US"/>
           </a:p>
         </p:txBody>
       </p:sp>
@@ -808,7 +816,7 @@
           <a:p>
             <a:fld id="{5BCAD085-E8A6-8845-BD4E-CB4CCA059FC4}" type="datetimeFigureOut">
               <a:rPr lang="en-US" smtClean="0"/>
-              <a:t>1/27/13</a:t>
+              <a:t>7/13/2026</a:t>
             </a:fld>
             <a:endParaRPr lang="en-US"/>
           </a:p>
@@ -911,10 +919,9 @@
           </a:lstStyle>
           <a:p>
             <a:r>
-              <a:rPr lang="en-US" smtClean="0"/>
+              <a:rPr lang="en-US"/>
               <a:t>Click to edit Master title style</a:t>
             </a:r>
-            <a:endParaRPr lang="en-US"/>
           </a:p>
         </p:txBody>
       </p:sp>
@@ -1031,7 +1038,7 @@
           <a:p>
             <a:pPr lvl="0"/>
             <a:r>
-              <a:rPr lang="en-US" smtClean="0"/>
+              <a:rPr lang="en-US"/>
               <a:t>Click to edit Master text styles</a:t>
             </a:r>
           </a:p>
@@ -1054,7 +1061,7 @@
           <a:p>
             <a:fld id="{5BCAD085-E8A6-8845-BD4E-CB4CCA059FC4}" type="datetimeFigureOut">
               <a:rPr lang="en-US" smtClean="0"/>
-              <a:t>1/27/13</a:t>
+              <a:t>7/13/2026</a:t>
             </a:fld>
             <a:endParaRPr lang="en-US"/>
           </a:p>
@@ -1148,10 +1155,9 @@
           <a:lstStyle/>
           <a:p>
             <a:r>
-              <a:rPr lang="en-US" smtClean="0"/>
+              <a:rPr lang="en-US"/>
               <a:t>Click to edit Master title style</a:t>
             </a:r>
-            <a:endParaRPr lang="en-US"/>
           </a:p>
         </p:txBody>
       </p:sp>
@@ -1205,38 +1211,37 @@
           <a:p>
             <a:pPr lvl="0"/>
             <a:r>
-              <a:rPr lang="en-US" smtClean="0"/>
+              <a:rPr lang="en-US"/>
               <a:t>Click to edit Master text styles</a:t>
             </a:r>
           </a:p>
           <a:p>
             <a:pPr lvl="1"/>
             <a:r>
-              <a:rPr lang="en-US" smtClean="0"/>
+              <a:rPr lang="en-US"/>
               <a:t>Second level</a:t>
             </a:r>
           </a:p>
           <a:p>
             <a:pPr lvl="2"/>
             <a:r>
-              <a:rPr lang="en-US" smtClean="0"/>
+              <a:rPr lang="en-US"/>
               <a:t>Third level</a:t>
             </a:r>
           </a:p>
           <a:p>
             <a:pPr lvl="3"/>
             <a:r>
-              <a:rPr lang="en-US" smtClean="0"/>
+              <a:rPr lang="en-US"/>
               <a:t>Fourth level</a:t>
             </a:r>
           </a:p>
           <a:p>
             <a:pPr lvl="4"/>
             <a:r>
-              <a:rPr lang="en-US" smtClean="0"/>
+              <a:rPr lang="en-US"/>
               <a:t>Fifth level</a:t>
             </a:r>
-            <a:endParaRPr lang="en-US"/>
           </a:p>
         </p:txBody>
       </p:sp>
@@ -1290,38 +1295,37 @@
           <a:p>
             <a:pPr lvl="0"/>
             <a:r>
-              <a:rPr lang="en-US" smtClean="0"/>
+              <a:rPr lang="en-US"/>
               <a:t>Click to edit Master text styles</a:t>
             </a:r>
           </a:p>
           <a:p>
             <a:pPr lvl="1"/>
             <a:r>
-              <a:rPr lang="en-US" smtClean="0"/>
+              <a:rPr lang="en-US"/>
               <a:t>Second level</a:t>
             </a:r>
           </a:p>
           <a:p>
             <a:pPr lvl="2"/>
             <a:r>
-              <a:rPr lang="en-US" smtClean="0"/>
+              <a:rPr lang="en-US"/>
               <a:t>Third level</a:t>
             </a:r>
           </a:p>
           <a:p>
             <a:pPr lvl="3"/>
             <a:r>
-              <a:rPr lang="en-US" smtClean="0"/>
+              <a:rPr lang="en-US"/>
               <a:t>Fourth level</a:t>
             </a:r>
           </a:p>
           <a:p>
             <a:pPr lvl="4"/>
             <a:r>
-              <a:rPr lang="en-US" smtClean="0"/>
+              <a:rPr lang="en-US"/>
               <a:t>Fifth level</a:t>
             </a:r>
-            <a:endParaRPr lang="en-US"/>
           </a:p>
         </p:txBody>
       </p:sp>
@@ -1342,7 +1346,7 @@
           <a:p>
             <a:fld id="{5BCAD085-E8A6-8845-BD4E-CB4CCA059FC4}" type="datetimeFigureOut">
               <a:rPr lang="en-US" smtClean="0"/>
-              <a:t>1/27/13</a:t>
+              <a:t>7/13/2026</a:t>
             </a:fld>
             <a:endParaRPr lang="en-US"/>
           </a:p>
@@ -1440,10 +1444,9 @@
           </a:lstStyle>
           <a:p>
             <a:r>
-              <a:rPr lang="en-US" smtClean="0"/>
+              <a:rPr lang="en-US"/>
               <a:t>Click to edit Master title style</a:t>
             </a:r>
-            <a:endParaRPr lang="en-US"/>
           </a:p>
         </p:txBody>
       </p:sp>
@@ -1506,7 +1509,7 @@
           <a:p>
             <a:pPr lvl="0"/>
             <a:r>
-              <a:rPr lang="en-US" smtClean="0"/>
+              <a:rPr lang="en-US"/>
               <a:t>Click to edit Master text styles</a:t>
             </a:r>
           </a:p>
@@ -1562,38 +1565,37 @@
           <a:p>
             <a:pPr lvl="0"/>
             <a:r>
-              <a:rPr lang="en-US" smtClean="0"/>
+              <a:rPr lang="en-US"/>
               <a:t>Click to edit Master text styles</a:t>
             </a:r>
           </a:p>
           <a:p>
             <a:pPr lvl="1"/>
             <a:r>
-              <a:rPr lang="en-US" smtClean="0"/>
+              <a:rPr lang="en-US"/>
               <a:t>Second level</a:t>
             </a:r>
           </a:p>
           <a:p>
             <a:pPr lvl="2"/>
             <a:r>
-              <a:rPr lang="en-US" smtClean="0"/>
+              <a:rPr lang="en-US"/>
               <a:t>Third level</a:t>
             </a:r>
           </a:p>
           <a:p>
             <a:pPr lvl="3"/>
             <a:r>
-              <a:rPr lang="en-US" smtClean="0"/>
+              <a:rPr lang="en-US"/>
               <a:t>Fourth level</a:t>
             </a:r>
           </a:p>
           <a:p>
             <a:pPr lvl="4"/>
             <a:r>
-              <a:rPr lang="en-US" smtClean="0"/>
+              <a:rPr lang="en-US"/>
               <a:t>Fifth level</a:t>
             </a:r>
-            <a:endParaRPr lang="en-US"/>
           </a:p>
         </p:txBody>
       </p:sp>
@@ -1656,7 +1658,7 @@
           <a:p>
             <a:pPr lvl="0"/>
             <a:r>
-              <a:rPr lang="en-US" smtClean="0"/>
+              <a:rPr lang="en-US"/>
               <a:t>Click to edit Master text styles</a:t>
             </a:r>
           </a:p>
@@ -1712,38 +1714,37 @@
           <a:p>
             <a:pPr lvl="0"/>
             <a:r>
-              <a:rPr lang="en-US" smtClean="0"/>
+              <a:rPr lang="en-US"/>
               <a:t>Click to edit Master text styles</a:t>
             </a:r>
           </a:p>
           <a:p>
             <a:pPr lvl="1"/>
             <a:r>
-              <a:rPr lang="en-US" smtClean="0"/>
+              <a:rPr lang="en-US"/>
               <a:t>Second level</a:t>
             </a:r>
           </a:p>
           <a:p>
             <a:pPr lvl="2"/>
             <a:r>
-              <a:rPr lang="en-US" smtClean="0"/>
+              <a:rPr lang="en-US"/>
               <a:t>Third level</a:t>
             </a:r>
           </a:p>
           <a:p>
             <a:pPr lvl="3"/>
             <a:r>
-              <a:rPr lang="en-US" smtClean="0"/>
+              <a:rPr lang="en-US"/>
               <a:t>Fourth level</a:t>
             </a:r>
           </a:p>
           <a:p>
             <a:pPr lvl="4"/>
             <a:r>
-              <a:rPr lang="en-US" smtClean="0"/>
+              <a:rPr lang="en-US"/>
               <a:t>Fifth level</a:t>
             </a:r>
-            <a:endParaRPr lang="en-US"/>
           </a:p>
         </p:txBody>
       </p:sp>
@@ -1764,7 +1765,7 @@
           <a:p>
             <a:fld id="{5BCAD085-E8A6-8845-BD4E-CB4CCA059FC4}" type="datetimeFigureOut">
               <a:rPr lang="en-US" smtClean="0"/>
-              <a:t>1/27/13</a:t>
+              <a:t>7/13/2026</a:t>
             </a:fld>
             <a:endParaRPr lang="en-US"/>
           </a:p>
@@ -1858,10 +1859,9 @@
           <a:lstStyle/>
           <a:p>
             <a:r>
-              <a:rPr lang="en-US" smtClean="0"/>
+              <a:rPr lang="en-US"/>
               <a:t>Click to edit Master title style</a:t>
             </a:r>
-            <a:endParaRPr lang="en-US"/>
           </a:p>
         </p:txBody>
       </p:sp>
@@ -1882,7 +1882,7 @@
           <a:p>
             <a:fld id="{5BCAD085-E8A6-8845-BD4E-CB4CCA059FC4}" type="datetimeFigureOut">
               <a:rPr lang="en-US" smtClean="0"/>
-              <a:t>1/27/13</a:t>
+              <a:t>7/13/2026</a:t>
             </a:fld>
             <a:endParaRPr lang="en-US"/>
           </a:p>
@@ -1977,7 +1977,7 @@
           <a:p>
             <a:fld id="{5BCAD085-E8A6-8845-BD4E-CB4CCA059FC4}" type="datetimeFigureOut">
               <a:rPr lang="en-US" smtClean="0"/>
-              <a:t>1/27/13</a:t>
+              <a:t>7/13/2026</a:t>
             </a:fld>
             <a:endParaRPr lang="en-US"/>
           </a:p>
@@ -2080,10 +2080,9 @@
           </a:lstStyle>
           <a:p>
             <a:r>
-              <a:rPr lang="en-US" smtClean="0"/>
+              <a:rPr lang="en-US"/>
               <a:t>Click to edit Master title style</a:t>
             </a:r>
-            <a:endParaRPr lang="en-US"/>
           </a:p>
         </p:txBody>
       </p:sp>
@@ -2137,38 +2136,37 @@
           <a:p>
             <a:pPr lvl="0"/>
             <a:r>
-              <a:rPr lang="en-US" smtClean="0"/>
+              <a:rPr lang="en-US"/>
               <a:t>Click to edit Master text styles</a:t>
             </a:r>
           </a:p>
           <a:p>
             <a:pPr lvl="1"/>
             <a:r>
-              <a:rPr lang="en-US" smtClean="0"/>
+              <a:rPr lang="en-US"/>
               <a:t>Second level</a:t>
             </a:r>
           </a:p>
           <a:p>
             <a:pPr lvl="2"/>
             <a:r>
-              <a:rPr lang="en-US" smtClean="0"/>
+              <a:rPr lang="en-US"/>
               <a:t>Third level</a:t>
             </a:r>
           </a:p>
           <a:p>
             <a:pPr lvl="3"/>
             <a:r>
-              <a:rPr lang="en-US" smtClean="0"/>
+              <a:rPr lang="en-US"/>
               <a:t>Fourth level</a:t>
             </a:r>
           </a:p>
           <a:p>
             <a:pPr lvl="4"/>
             <a:r>
-              <a:rPr lang="en-US" smtClean="0"/>
+              <a:rPr lang="en-US"/>
               <a:t>Fifth level</a:t>
             </a:r>
-            <a:endParaRPr lang="en-US"/>
           </a:p>
         </p:txBody>
       </p:sp>
@@ -2231,7 +2229,7 @@
           <a:p>
             <a:pPr lvl="0"/>
             <a:r>
-              <a:rPr lang="en-US" smtClean="0"/>
+              <a:rPr lang="en-US"/>
               <a:t>Click to edit Master text styles</a:t>
             </a:r>
           </a:p>
@@ -2254,7 +2252,7 @@
           <a:p>
             <a:fld id="{5BCAD085-E8A6-8845-BD4E-CB4CCA059FC4}" type="datetimeFigureOut">
               <a:rPr lang="en-US" smtClean="0"/>
-              <a:t>1/27/13</a:t>
+              <a:t>7/13/2026</a:t>
             </a:fld>
             <a:endParaRPr lang="en-US"/>
           </a:p>
@@ -2357,10 +2355,9 @@
           </a:lstStyle>
           <a:p>
             <a:r>
-              <a:rPr lang="en-US" smtClean="0"/>
+              <a:rPr lang="en-US"/>
               <a:t>Click to edit Master title style</a:t>
             </a:r>
-            <a:endParaRPr lang="en-US"/>
           </a:p>
         </p:txBody>
       </p:sp>
@@ -2484,7 +2481,7 @@
           <a:p>
             <a:pPr lvl="0"/>
             <a:r>
-              <a:rPr lang="en-US" smtClean="0"/>
+              <a:rPr lang="en-US"/>
               <a:t>Click to edit Master text styles</a:t>
             </a:r>
           </a:p>
@@ -2507,7 +2504,7 @@
           <a:p>
             <a:fld id="{5BCAD085-E8A6-8845-BD4E-CB4CCA059FC4}" type="datetimeFigureOut">
               <a:rPr lang="en-US" smtClean="0"/>
-              <a:t>1/27/13</a:t>
+              <a:t>7/13/2026</a:t>
             </a:fld>
             <a:endParaRPr lang="en-US"/>
           </a:p>
@@ -2616,10 +2613,9 @@
           <a:lstStyle/>
           <a:p>
             <a:r>
-              <a:rPr lang="en-US" smtClean="0"/>
+              <a:rPr lang="en-US"/>
               <a:t>Click to edit Master title style</a:t>
             </a:r>
-            <a:endParaRPr lang="en-US"/>
           </a:p>
         </p:txBody>
       </p:sp>
@@ -2650,38 +2646,37 @@
           <a:p>
             <a:pPr lvl="0"/>
             <a:r>
-              <a:rPr lang="en-US" smtClean="0"/>
+              <a:rPr lang="en-US"/>
               <a:t>Click to edit Master text styles</a:t>
             </a:r>
           </a:p>
           <a:p>
             <a:pPr lvl="1"/>
             <a:r>
-              <a:rPr lang="en-US" smtClean="0"/>
+              <a:rPr lang="en-US"/>
               <a:t>Second level</a:t>
             </a:r>
           </a:p>
           <a:p>
             <a:pPr lvl="2"/>
             <a:r>
-              <a:rPr lang="en-US" smtClean="0"/>
+              <a:rPr lang="en-US"/>
               <a:t>Third level</a:t>
             </a:r>
           </a:p>
           <a:p>
             <a:pPr lvl="3"/>
             <a:r>
-              <a:rPr lang="en-US" smtClean="0"/>
+              <a:rPr lang="en-US"/>
               <a:t>Fourth level</a:t>
             </a:r>
           </a:p>
           <a:p>
             <a:pPr lvl="4"/>
             <a:r>
-              <a:rPr lang="en-US" smtClean="0"/>
+              <a:rPr lang="en-US"/>
               <a:t>Fifth level</a:t>
             </a:r>
-            <a:endParaRPr lang="en-US"/>
           </a:p>
         </p:txBody>
       </p:sp>
@@ -2720,7 +2715,7 @@
           <a:p>
             <a:fld id="{5BCAD085-E8A6-8845-BD4E-CB4CCA059FC4}" type="datetimeFigureOut">
               <a:rPr lang="en-US" smtClean="0"/>
-              <a:t>1/27/13</a:t>
+              <a:t>7/13/2026</a:t>
             </a:fld>
             <a:endParaRPr lang="en-US"/>
           </a:p>
@@ -3079,7 +3074,7 @@
 </file>
 
 <file path=ppt/slides/slide1.xml><?xml version="1.0" encoding="utf-8"?>
-<p:sld xmlns:a="http://schemas.openxmlformats.org/drawingml/2006/main" xmlns:p="http://schemas.openxmlformats.org/presentationml/2006/main" xmlns:r="http://schemas.openxmlformats.org/officeDocument/2006/relationships">
+<p:sld xmlns:a="http://schemas.openxmlformats.org/drawingml/2006/main" xmlns:r="http://schemas.openxmlformats.org/officeDocument/2006/relationships" xmlns:p="http://schemas.openxmlformats.org/presentationml/2006/main">
   <p:cSld>
     <p:spTree>
       <p:nvGrpSpPr>
@@ -3087,31 +3082,3583 @@
         <p:cNvGrpSpPr/>
         <p:nvPr/>
       </p:nvGrpSpPr>
-      <p:grpSpPr/>
-      <p:pic>
-        <p:nvPicPr>
-          <p:cNvPr id="2" name="Picture 1" descr="bchain_mapping.png"/>
-          <p:cNvPicPr>
-            <a:picLocks noChangeAspect="1"/>
-          </p:cNvPicPr>
+      <p:grpSpPr>
+        <a:xfrm>
+          <a:off x="0" y="0"/>
+          <a:ext cx="0" cy="0"/>
+          <a:chOff x="0" y="0"/>
+          <a:chExt cx="0" cy="0"/>
+        </a:xfrm>
+      </p:grpSpPr>
+      <p:sp>
+        <p:nvSpPr>
+          <p:cNvPr id="2" name="Rounded Rectangle 1"/>
+          <p:cNvSpPr/>
           <p:nvPr/>
-        </p:nvPicPr>
-        <p:blipFill>
-          <a:blip r:embed="rId2"/>
-          <a:stretch>
-            <a:fillRect/>
-          </a:stretch>
-        </p:blipFill>
+        </p:nvSpPr>
         <p:spPr>
           <a:xfrm>
-            <a:off x="0" y="0"/>
-            <a:ext cx="12191695" cy="7162620"/>
+            <a:off x="128925" y="106676"/>
+            <a:ext cx="2972488" cy="739347"/>
+          </a:xfrm>
+          <a:prstGeom prst="roundRect">
+            <a:avLst>
+              <a:gd name="adj" fmla="val 10000"/>
+            </a:avLst>
+          </a:prstGeom>
+          <a:solidFill>
+            <a:srgbClr val="00428D"/>
+          </a:solidFill>
+          <a:ln>
+            <a:noFill/>
+          </a:ln>
+        </p:spPr>
+        <p:style>
+          <a:lnRef idx="1">
+            <a:schemeClr val="accent1"/>
+          </a:lnRef>
+          <a:fillRef idx="3">
+            <a:schemeClr val="accent1"/>
+          </a:fillRef>
+          <a:effectRef idx="2">
+            <a:schemeClr val="accent1"/>
+          </a:effectRef>
+          <a:fontRef idx="minor">
+            <a:schemeClr val="lt1"/>
+          </a:fontRef>
+        </p:style>
+        <p:txBody>
+          <a:bodyPr rtlCol="0" anchor="ctr"/>
+          <a:lstStyle/>
+          <a:p>
+            <a:pPr algn="ctr"/>
+            <a:r>
+              <a:rPr sz="1400" dirty="0">
+                <a:latin typeface="Times New Roman" panose="02020603050405020304" pitchFamily="18" charset="0"/>
+                <a:cs typeface="Times New Roman" panose="02020603050405020304" pitchFamily="18" charset="0"/>
+              </a:rPr>
+              <a:t>1.  BARRIER DIMENSIONS</a:t>
+            </a:r>
+          </a:p>
+        </p:txBody>
+      </p:sp>
+      <p:sp>
+        <p:nvSpPr>
+          <p:cNvPr id="3" name="Rounded Rectangle 2"/>
+          <p:cNvSpPr/>
+          <p:nvPr/>
+        </p:nvSpPr>
+        <p:spPr>
+          <a:xfrm>
+            <a:off x="3325998" y="120680"/>
+            <a:ext cx="2864202" cy="717583"/>
+          </a:xfrm>
+          <a:prstGeom prst="roundRect">
+            <a:avLst>
+              <a:gd name="adj" fmla="val 10000"/>
+            </a:avLst>
+          </a:prstGeom>
+          <a:solidFill>
+            <a:srgbClr val="00428D"/>
+          </a:solidFill>
+          <a:ln>
+            <a:noFill/>
+          </a:ln>
+        </p:spPr>
+        <p:style>
+          <a:lnRef idx="1">
+            <a:schemeClr val="accent1"/>
+          </a:lnRef>
+          <a:fillRef idx="3">
+            <a:schemeClr val="accent1"/>
+          </a:fillRef>
+          <a:effectRef idx="2">
+            <a:schemeClr val="accent1"/>
+          </a:effectRef>
+          <a:fontRef idx="minor">
+            <a:schemeClr val="lt1"/>
+          </a:fontRef>
+        </p:style>
+        <p:txBody>
+          <a:bodyPr rtlCol="0" anchor="ctr"/>
+          <a:lstStyle/>
+          <a:p>
+            <a:pPr algn="ctr"/>
+            <a:r>
+              <a:rPr sz="1400" dirty="0">
+                <a:latin typeface="Times New Roman" panose="02020603050405020304" pitchFamily="18" charset="0"/>
+                <a:cs typeface="Times New Roman" panose="02020603050405020304" pitchFamily="18" charset="0"/>
+              </a:rPr>
+              <a:t>2.  HCI INTEGRATION PRINCIPLES</a:t>
+            </a:r>
+          </a:p>
+        </p:txBody>
+      </p:sp>
+      <p:sp>
+        <p:nvSpPr>
+          <p:cNvPr id="4" name="Rounded Rectangle 3"/>
+          <p:cNvSpPr/>
+          <p:nvPr/>
+        </p:nvSpPr>
+        <p:spPr>
+          <a:xfrm>
+            <a:off x="6452321" y="126721"/>
+            <a:ext cx="2575683" cy="703196"/>
+          </a:xfrm>
+          <a:prstGeom prst="roundRect">
+            <a:avLst>
+              <a:gd name="adj" fmla="val 10000"/>
+            </a:avLst>
+          </a:prstGeom>
+          <a:solidFill>
+            <a:srgbClr val="00428D"/>
+          </a:solidFill>
+          <a:ln>
+            <a:noFill/>
+          </a:ln>
+        </p:spPr>
+        <p:style>
+          <a:lnRef idx="1">
+            <a:schemeClr val="accent1"/>
+          </a:lnRef>
+          <a:fillRef idx="3">
+            <a:schemeClr val="accent1"/>
+          </a:fillRef>
+          <a:effectRef idx="2">
+            <a:schemeClr val="accent1"/>
+          </a:effectRef>
+          <a:fontRef idx="minor">
+            <a:schemeClr val="lt1"/>
+          </a:fontRef>
+        </p:style>
+        <p:txBody>
+          <a:bodyPr rtlCol="0" anchor="ctr"/>
+          <a:lstStyle/>
+          <a:p>
+            <a:pPr algn="ctr"/>
+            <a:r>
+              <a:rPr sz="1400" dirty="0">
+                <a:latin typeface="Times New Roman" panose="02020603050405020304" pitchFamily="18" charset="0"/>
+                <a:cs typeface="Times New Roman" panose="02020603050405020304" pitchFamily="18" charset="0"/>
+              </a:rPr>
+              <a:t>3.  DESIGN OBJECTIVES</a:t>
+            </a:r>
+          </a:p>
+        </p:txBody>
+      </p:sp>
+      <p:sp>
+        <p:nvSpPr>
+          <p:cNvPr id="5" name="Rounded Rectangle 4"/>
+          <p:cNvSpPr/>
+          <p:nvPr/>
+        </p:nvSpPr>
+        <p:spPr>
+          <a:xfrm>
+            <a:off x="9272695" y="118513"/>
+            <a:ext cx="2757625" cy="731586"/>
+          </a:xfrm>
+          <a:prstGeom prst="roundRect">
+            <a:avLst>
+              <a:gd name="adj" fmla="val 10000"/>
+            </a:avLst>
+          </a:prstGeom>
+          <a:solidFill>
+            <a:srgbClr val="00428D"/>
+          </a:solidFill>
+          <a:ln>
+            <a:noFill/>
+          </a:ln>
+        </p:spPr>
+        <p:style>
+          <a:lnRef idx="1">
+            <a:schemeClr val="accent1"/>
+          </a:lnRef>
+          <a:fillRef idx="3">
+            <a:schemeClr val="accent1"/>
+          </a:fillRef>
+          <a:effectRef idx="2">
+            <a:schemeClr val="accent1"/>
+          </a:effectRef>
+          <a:fontRef idx="minor">
+            <a:schemeClr val="lt1"/>
+          </a:fontRef>
+        </p:style>
+        <p:txBody>
+          <a:bodyPr rtlCol="0" anchor="ctr"/>
+          <a:lstStyle/>
+          <a:p>
+            <a:pPr algn="ctr"/>
+            <a:r>
+              <a:rPr sz="1400" dirty="0">
+                <a:latin typeface="Times New Roman" panose="02020603050405020304" pitchFamily="18" charset="0"/>
+                <a:cs typeface="Times New Roman" panose="02020603050405020304" pitchFamily="18" charset="0"/>
+              </a:rPr>
+              <a:t>4.  BCHAIN-ACCESS INTEGRATION</a:t>
+            </a:r>
+          </a:p>
+        </p:txBody>
+      </p:sp>
+      <p:sp>
+        <p:nvSpPr>
+          <p:cNvPr id="9" name="Rounded Rectangle 8"/>
+          <p:cNvSpPr/>
+          <p:nvPr/>
+        </p:nvSpPr>
+        <p:spPr>
+          <a:xfrm>
+            <a:off x="9299665" y="997911"/>
+            <a:ext cx="2698195" cy="1039479"/>
+          </a:xfrm>
+          <a:prstGeom prst="roundRect">
+            <a:avLst>
+              <a:gd name="adj" fmla="val 6000"/>
+            </a:avLst>
+          </a:prstGeom>
+          <a:solidFill>
+            <a:srgbClr val="DCE7F0"/>
+          </a:solidFill>
+          <a:ln w="28575">
+            <a:solidFill>
+              <a:schemeClr val="tx1"/>
+            </a:solidFill>
+          </a:ln>
+          <a:effectLst/>
+        </p:spPr>
+        <p:style>
+          <a:lnRef idx="1">
+            <a:schemeClr val="accent1"/>
+          </a:lnRef>
+          <a:fillRef idx="3">
+            <a:schemeClr val="accent1"/>
+          </a:fillRef>
+          <a:effectRef idx="2">
+            <a:schemeClr val="accent1"/>
+          </a:effectRef>
+          <a:fontRef idx="minor">
+            <a:schemeClr val="lt1"/>
+          </a:fontRef>
+        </p:style>
+        <p:txBody>
+          <a:bodyPr wrap="square" lIns="146304" tIns="91440" rIns="146304" bIns="91440" rtlCol="0" anchor="t"/>
+          <a:lstStyle/>
+          <a:p>
+            <a:pPr>
+              <a:spcAft>
+                <a:spcPts val="200"/>
+              </a:spcAft>
+            </a:pPr>
+            <a:r>
+              <a:rPr lang="en-US" sz="1400" b="1" dirty="0">
+                <a:solidFill>
+                  <a:srgbClr val="004B9E"/>
+                </a:solidFill>
+                <a:latin typeface="Times New Roman" panose="02020603050405020304" pitchFamily="18" charset="0"/>
+                <a:cs typeface="Times New Roman" panose="02020603050405020304" pitchFamily="18" charset="0"/>
+              </a:rPr>
+              <a:t>AAD</a:t>
+            </a:r>
+            <a:endParaRPr sz="1400" b="1" dirty="0">
+              <a:solidFill>
+                <a:srgbClr val="004B9E"/>
+              </a:solidFill>
+              <a:latin typeface="Times New Roman" panose="02020603050405020304" pitchFamily="18" charset="0"/>
+              <a:cs typeface="Times New Roman" panose="02020603050405020304" pitchFamily="18" charset="0"/>
+            </a:endParaRPr>
+          </a:p>
+          <a:p>
+            <a:pPr algn="l">
+              <a:spcBef>
+                <a:spcPts val="0"/>
+              </a:spcBef>
+              <a:spcAft>
+                <a:spcPts val="200"/>
+              </a:spcAft>
+            </a:pPr>
+            <a:r>
+              <a:rPr sz="1400" b="1" dirty="0">
+                <a:solidFill>
+                  <a:srgbClr val="20242A"/>
+                </a:solidFill>
+                <a:latin typeface="Times New Roman" panose="02020603050405020304" pitchFamily="18" charset="0"/>
+                <a:cs typeface="Times New Roman" panose="02020603050405020304" pitchFamily="18" charset="0"/>
+              </a:rPr>
+              <a:t>Accessible authentication</a:t>
+            </a:r>
+          </a:p>
+        </p:txBody>
+      </p:sp>
+      <p:sp>
+        <p:nvSpPr>
+          <p:cNvPr id="17" name="Rounded Rectangle 16"/>
+          <p:cNvSpPr/>
+          <p:nvPr/>
+        </p:nvSpPr>
+        <p:spPr>
+          <a:xfrm>
+            <a:off x="9299665" y="2166521"/>
+            <a:ext cx="2698195" cy="993274"/>
+          </a:xfrm>
+          <a:prstGeom prst="roundRect">
+            <a:avLst>
+              <a:gd name="adj" fmla="val 6000"/>
+            </a:avLst>
+          </a:prstGeom>
+          <a:solidFill>
+            <a:srgbClr val="D8ECE3"/>
+          </a:solidFill>
+          <a:ln w="28575">
+            <a:solidFill>
+              <a:schemeClr val="tx1"/>
+            </a:solidFill>
+          </a:ln>
+          <a:effectLst/>
+        </p:spPr>
+        <p:style>
+          <a:lnRef idx="1">
+            <a:schemeClr val="accent1"/>
+          </a:lnRef>
+          <a:fillRef idx="3">
+            <a:schemeClr val="accent1"/>
+          </a:fillRef>
+          <a:effectRef idx="2">
+            <a:schemeClr val="accent1"/>
+          </a:effectRef>
+          <a:fontRef idx="minor">
+            <a:schemeClr val="lt1"/>
+          </a:fontRef>
+        </p:style>
+        <p:txBody>
+          <a:bodyPr wrap="square" lIns="146304" tIns="91440" rIns="146304" bIns="91440" rtlCol="0" anchor="t"/>
+          <a:lstStyle/>
+          <a:p>
+            <a:pPr>
+              <a:spcAft>
+                <a:spcPts val="200"/>
+              </a:spcAft>
+            </a:pPr>
+            <a:r>
+              <a:rPr lang="en-US" sz="1400" b="1" dirty="0">
+                <a:solidFill>
+                  <a:srgbClr val="0B6A3A"/>
+                </a:solidFill>
+                <a:latin typeface="Times New Roman" panose="02020603050405020304" pitchFamily="18" charset="0"/>
+                <a:cs typeface="Times New Roman" panose="02020603050405020304" pitchFamily="18" charset="0"/>
+              </a:rPr>
+              <a:t>PTD</a:t>
+            </a:r>
+            <a:endParaRPr sz="1400" b="1" dirty="0">
+              <a:solidFill>
+                <a:srgbClr val="0B6A3A"/>
+              </a:solidFill>
+              <a:latin typeface="Times New Roman" panose="02020603050405020304" pitchFamily="18" charset="0"/>
+              <a:cs typeface="Times New Roman" panose="02020603050405020304" pitchFamily="18" charset="0"/>
+            </a:endParaRPr>
+          </a:p>
+          <a:p>
+            <a:pPr algn="l">
+              <a:spcBef>
+                <a:spcPts val="0"/>
+              </a:spcBef>
+              <a:spcAft>
+                <a:spcPts val="200"/>
+              </a:spcAft>
+            </a:pPr>
+            <a:r>
+              <a:rPr sz="1400" b="1" dirty="0">
+                <a:solidFill>
+                  <a:srgbClr val="20242A"/>
+                </a:solidFill>
+                <a:latin typeface="Times New Roman" panose="02020603050405020304" pitchFamily="18" charset="0"/>
+                <a:cs typeface="Times New Roman" panose="02020603050405020304" pitchFamily="18" charset="0"/>
+              </a:rPr>
+              <a:t>Transparent user interface</a:t>
+            </a:r>
+          </a:p>
+        </p:txBody>
+      </p:sp>
+      <p:sp>
+        <p:nvSpPr>
+          <p:cNvPr id="25" name="Rounded Rectangle 24"/>
+          <p:cNvSpPr/>
+          <p:nvPr/>
+        </p:nvSpPr>
+        <p:spPr>
+          <a:xfrm>
+            <a:off x="9291119" y="3318038"/>
+            <a:ext cx="2698195" cy="1014515"/>
+          </a:xfrm>
+          <a:prstGeom prst="roundRect">
+            <a:avLst>
+              <a:gd name="adj" fmla="val 6000"/>
+            </a:avLst>
+          </a:prstGeom>
+          <a:solidFill>
+            <a:srgbClr val="EDE1CB"/>
+          </a:solidFill>
+          <a:ln w="28575">
+            <a:solidFill>
+              <a:schemeClr val="tx1"/>
+            </a:solidFill>
+          </a:ln>
+          <a:effectLst/>
+        </p:spPr>
+        <p:style>
+          <a:lnRef idx="1">
+            <a:schemeClr val="accent1"/>
+          </a:lnRef>
+          <a:fillRef idx="3">
+            <a:schemeClr val="accent1"/>
+          </a:fillRef>
+          <a:effectRef idx="2">
+            <a:schemeClr val="accent1"/>
+          </a:effectRef>
+          <a:fontRef idx="minor">
+            <a:schemeClr val="lt1"/>
+          </a:fontRef>
+        </p:style>
+        <p:txBody>
+          <a:bodyPr wrap="square" lIns="146304" tIns="91440" rIns="146304" bIns="91440" rtlCol="0" anchor="t"/>
+          <a:lstStyle/>
+          <a:p>
+            <a:pPr>
+              <a:spcAft>
+                <a:spcPts val="200"/>
+              </a:spcAft>
+            </a:pPr>
+            <a:r>
+              <a:rPr lang="en-US" sz="1400" b="1" dirty="0">
+                <a:solidFill>
+                  <a:srgbClr val="D86B00"/>
+                </a:solidFill>
+                <a:latin typeface="Times New Roman" panose="02020603050405020304" pitchFamily="18" charset="0"/>
+                <a:cs typeface="Times New Roman" panose="02020603050405020304" pitchFamily="18" charset="0"/>
+              </a:rPr>
+              <a:t>CID</a:t>
+            </a:r>
+            <a:endParaRPr sz="1400" b="1" dirty="0">
+              <a:solidFill>
+                <a:srgbClr val="D86B00"/>
+              </a:solidFill>
+              <a:latin typeface="Times New Roman" panose="02020603050405020304" pitchFamily="18" charset="0"/>
+              <a:cs typeface="Times New Roman" panose="02020603050405020304" pitchFamily="18" charset="0"/>
+            </a:endParaRPr>
+          </a:p>
+          <a:p>
+            <a:pPr algn="l">
+              <a:spcBef>
+                <a:spcPts val="0"/>
+              </a:spcBef>
+              <a:spcAft>
+                <a:spcPts val="200"/>
+              </a:spcAft>
+            </a:pPr>
+            <a:r>
+              <a:rPr sz="1400" b="1" dirty="0">
+                <a:solidFill>
+                  <a:srgbClr val="20242A"/>
+                </a:solidFill>
+                <a:latin typeface="Times New Roman" panose="02020603050405020304" pitchFamily="18" charset="0"/>
+                <a:cs typeface="Times New Roman" panose="02020603050405020304" pitchFamily="18" charset="0"/>
+              </a:rPr>
+              <a:t>Confirmatory interaction</a:t>
+            </a:r>
+          </a:p>
+        </p:txBody>
+      </p:sp>
+      <p:grpSp>
+        <p:nvGrpSpPr>
+          <p:cNvPr id="51" name="Group 50">
+            <a:extLst>
+              <a:ext uri="{FF2B5EF4-FFF2-40B4-BE49-F238E27FC236}">
+                <a16:creationId xmlns:a16="http://schemas.microsoft.com/office/drawing/2014/main" id="{2E8FD251-9B14-A526-CA56-4866E395CF2B}"/>
+              </a:ext>
+            </a:extLst>
+          </p:cNvPr>
+          <p:cNvGrpSpPr/>
+          <p:nvPr/>
+        </p:nvGrpSpPr>
+        <p:grpSpPr>
+          <a:xfrm>
+            <a:off x="84320" y="970983"/>
+            <a:ext cx="3030315" cy="4679632"/>
+            <a:chOff x="156024" y="767995"/>
+            <a:chExt cx="3030315" cy="4508505"/>
+          </a:xfrm>
+        </p:grpSpPr>
+        <p:sp>
+          <p:nvSpPr>
+            <p:cNvPr id="6" name="Rounded Rectangle 5"/>
+            <p:cNvSpPr/>
+            <p:nvPr/>
+          </p:nvSpPr>
+          <p:spPr>
+            <a:xfrm>
+              <a:off x="156024" y="767995"/>
+              <a:ext cx="3030315" cy="1056674"/>
+            </a:xfrm>
+            <a:prstGeom prst="roundRect">
+              <a:avLst>
+                <a:gd name="adj" fmla="val 6000"/>
+              </a:avLst>
+            </a:prstGeom>
+            <a:solidFill>
+              <a:srgbClr val="EAF0F5"/>
+            </a:solidFill>
+            <a:ln w="28575">
+              <a:solidFill>
+                <a:schemeClr val="tx1"/>
+              </a:solidFill>
+            </a:ln>
+            <a:effectLst/>
+          </p:spPr>
+          <p:style>
+            <a:lnRef idx="1">
+              <a:schemeClr val="accent1"/>
+            </a:lnRef>
+            <a:fillRef idx="3">
+              <a:schemeClr val="accent1"/>
+            </a:fillRef>
+            <a:effectRef idx="2">
+              <a:schemeClr val="accent1"/>
+            </a:effectRef>
+            <a:fontRef idx="minor">
+              <a:schemeClr val="lt1"/>
+            </a:fontRef>
+          </p:style>
+          <p:txBody>
+            <a:bodyPr wrap="square" lIns="128016" tIns="91440" rIns="128016" bIns="91440" rtlCol="0" anchor="t"/>
+            <a:lstStyle/>
+            <a:p>
+              <a:pPr algn="l">
+                <a:spcBef>
+                  <a:spcPts val="0"/>
+                </a:spcBef>
+                <a:spcAft>
+                  <a:spcPts val="200"/>
+                </a:spcAft>
+              </a:pPr>
+              <a:r>
+                <a:rPr sz="1400" b="1" dirty="0">
+                  <a:solidFill>
+                    <a:srgbClr val="004B9E"/>
+                  </a:solidFill>
+                  <a:latin typeface="Times New Roman" panose="02020603050405020304" pitchFamily="18" charset="0"/>
+                  <a:cs typeface="Times New Roman" panose="02020603050405020304" pitchFamily="18" charset="0"/>
+                </a:rPr>
+                <a:t>B1–B3</a:t>
+              </a:r>
+              <a:r>
+                <a:rPr lang="en-US" sz="1400" b="1" dirty="0">
+                  <a:solidFill>
+                    <a:srgbClr val="004B9E"/>
+                  </a:solidFill>
+                  <a:latin typeface="Times New Roman" panose="02020603050405020304" pitchFamily="18" charset="0"/>
+                  <a:cs typeface="Times New Roman" panose="02020603050405020304" pitchFamily="18" charset="0"/>
+                </a:rPr>
+                <a:t> </a:t>
+              </a:r>
+              <a:r>
+                <a:rPr sz="1400" b="1" dirty="0">
+                  <a:solidFill>
+                    <a:srgbClr val="004B9E"/>
+                  </a:solidFill>
+                  <a:latin typeface="Times New Roman" panose="02020603050405020304" pitchFamily="18" charset="0"/>
+                  <a:cs typeface="Times New Roman" panose="02020603050405020304" pitchFamily="18" charset="0"/>
+                </a:rPr>
+                <a:t>Authentication</a:t>
+              </a:r>
+              <a:r>
+                <a:rPr lang="en-US" sz="1400" b="1" dirty="0">
+                  <a:solidFill>
+                    <a:srgbClr val="004B9E"/>
+                  </a:solidFill>
+                  <a:latin typeface="Times New Roman" panose="02020603050405020304" pitchFamily="18" charset="0"/>
+                  <a:cs typeface="Times New Roman" panose="02020603050405020304" pitchFamily="18" charset="0"/>
+                </a:rPr>
+                <a:t> </a:t>
+              </a:r>
+              <a:r>
+                <a:rPr sz="1400" b="1" dirty="0">
+                  <a:solidFill>
+                    <a:srgbClr val="004B9E"/>
+                  </a:solidFill>
+                  <a:latin typeface="Times New Roman" panose="02020603050405020304" pitchFamily="18" charset="0"/>
+                  <a:cs typeface="Times New Roman" panose="02020603050405020304" pitchFamily="18" charset="0"/>
+                </a:rPr>
+                <a:t>Complexity</a:t>
+              </a:r>
+            </a:p>
+            <a:p>
+              <a:pPr algn="l">
+                <a:spcBef>
+                  <a:spcPts val="0"/>
+                </a:spcBef>
+                <a:spcAft>
+                  <a:spcPts val="200"/>
+                </a:spcAft>
+              </a:pPr>
+              <a:r>
+                <a:rPr sz="1400" b="0" dirty="0">
+                  <a:solidFill>
+                    <a:srgbClr val="4A515A"/>
+                  </a:solidFill>
+                  <a:latin typeface="Times New Roman" panose="02020603050405020304" pitchFamily="18" charset="0"/>
+                  <a:cs typeface="Times New Roman" panose="02020603050405020304" pitchFamily="18" charset="0"/>
+                </a:rPr>
+                <a:t>Multi-step authentication increases cognitive load and errors.</a:t>
+              </a:r>
+            </a:p>
+          </p:txBody>
+        </p:sp>
+        <p:sp>
+          <p:nvSpPr>
+            <p:cNvPr id="14" name="Rounded Rectangle 13"/>
+            <p:cNvSpPr/>
+            <p:nvPr/>
+          </p:nvSpPr>
+          <p:spPr>
+            <a:xfrm>
+              <a:off x="156024" y="1912140"/>
+              <a:ext cx="3017093" cy="975335"/>
+            </a:xfrm>
+            <a:prstGeom prst="roundRect">
+              <a:avLst>
+                <a:gd name="adj" fmla="val 6000"/>
+              </a:avLst>
+            </a:prstGeom>
+            <a:solidFill>
+              <a:srgbClr val="E9F2EE"/>
+            </a:solidFill>
+            <a:ln w="28575">
+              <a:solidFill>
+                <a:schemeClr val="tx1"/>
+              </a:solidFill>
+            </a:ln>
+            <a:effectLst/>
+          </p:spPr>
+          <p:style>
+            <a:lnRef idx="1">
+              <a:schemeClr val="accent1"/>
+            </a:lnRef>
+            <a:fillRef idx="3">
+              <a:schemeClr val="accent1"/>
+            </a:fillRef>
+            <a:effectRef idx="2">
+              <a:schemeClr val="accent1"/>
+            </a:effectRef>
+            <a:fontRef idx="minor">
+              <a:schemeClr val="lt1"/>
+            </a:fontRef>
+          </p:style>
+          <p:txBody>
+            <a:bodyPr wrap="square" lIns="128016" tIns="91440" rIns="128016" bIns="91440" rtlCol="0" anchor="t"/>
+            <a:lstStyle/>
+            <a:p>
+              <a:pPr algn="l">
+                <a:spcBef>
+                  <a:spcPts val="0"/>
+                </a:spcBef>
+                <a:spcAft>
+                  <a:spcPts val="200"/>
+                </a:spcAft>
+              </a:pPr>
+              <a:r>
+                <a:rPr sz="1400" b="1" dirty="0">
+                  <a:solidFill>
+                    <a:srgbClr val="0B6A3A"/>
+                  </a:solidFill>
+                  <a:latin typeface="Times New Roman" panose="02020603050405020304" pitchFamily="18" charset="0"/>
+                  <a:cs typeface="Times New Roman" panose="02020603050405020304" pitchFamily="18" charset="0"/>
+                </a:rPr>
+                <a:t>B4–B6 Interface</a:t>
+              </a:r>
+              <a:r>
+                <a:rPr lang="en-US" sz="1400" b="1" dirty="0">
+                  <a:solidFill>
+                    <a:srgbClr val="0B6A3A"/>
+                  </a:solidFill>
+                  <a:latin typeface="Times New Roman" panose="02020603050405020304" pitchFamily="18" charset="0"/>
+                  <a:cs typeface="Times New Roman" panose="02020603050405020304" pitchFamily="18" charset="0"/>
+                </a:rPr>
+                <a:t> </a:t>
+              </a:r>
+              <a:r>
+                <a:rPr sz="1400" b="1" dirty="0">
+                  <a:solidFill>
+                    <a:srgbClr val="0B6A3A"/>
+                  </a:solidFill>
+                  <a:latin typeface="Times New Roman" panose="02020603050405020304" pitchFamily="18" charset="0"/>
+                  <a:cs typeface="Times New Roman" panose="02020603050405020304" pitchFamily="18" charset="0"/>
+                </a:rPr>
+                <a:t>Transparency</a:t>
+              </a:r>
+            </a:p>
+            <a:p>
+              <a:pPr algn="l">
+                <a:spcBef>
+                  <a:spcPts val="0"/>
+                </a:spcBef>
+                <a:spcAft>
+                  <a:spcPts val="200"/>
+                </a:spcAft>
+              </a:pPr>
+              <a:r>
+                <a:rPr sz="1400" b="0" dirty="0">
+                  <a:solidFill>
+                    <a:srgbClr val="4A515A"/>
+                  </a:solidFill>
+                  <a:latin typeface="Times New Roman" panose="02020603050405020304" pitchFamily="18" charset="0"/>
+                  <a:cs typeface="Times New Roman" panose="02020603050405020304" pitchFamily="18" charset="0"/>
+                </a:rPr>
+                <a:t>Poor transparency and technical jargon reduce understanding.</a:t>
+              </a:r>
+            </a:p>
+          </p:txBody>
+        </p:sp>
+        <p:sp>
+          <p:nvSpPr>
+            <p:cNvPr id="22" name="Rounded Rectangle 21"/>
+            <p:cNvSpPr/>
+            <p:nvPr/>
+          </p:nvSpPr>
+          <p:spPr>
+            <a:xfrm>
+              <a:off x="156024" y="2977834"/>
+              <a:ext cx="3030315" cy="1099861"/>
+            </a:xfrm>
+            <a:prstGeom prst="roundRect">
+              <a:avLst>
+                <a:gd name="adj" fmla="val 6000"/>
+              </a:avLst>
+            </a:prstGeom>
+            <a:solidFill>
+              <a:srgbClr val="F4EEE2"/>
+            </a:solidFill>
+            <a:ln w="28575">
+              <a:solidFill>
+                <a:schemeClr val="tx1"/>
+              </a:solidFill>
+            </a:ln>
+            <a:effectLst/>
+          </p:spPr>
+          <p:style>
+            <a:lnRef idx="1">
+              <a:schemeClr val="accent1"/>
+            </a:lnRef>
+            <a:fillRef idx="3">
+              <a:schemeClr val="accent1"/>
+            </a:fillRef>
+            <a:effectRef idx="2">
+              <a:schemeClr val="accent1"/>
+            </a:effectRef>
+            <a:fontRef idx="minor">
+              <a:schemeClr val="lt1"/>
+            </a:fontRef>
+          </p:style>
+          <p:txBody>
+            <a:bodyPr wrap="square" lIns="128016" tIns="91440" rIns="128016" bIns="91440" rtlCol="0" anchor="t"/>
+            <a:lstStyle/>
+            <a:p>
+              <a:pPr algn="l">
+                <a:spcBef>
+                  <a:spcPts val="0"/>
+                </a:spcBef>
+                <a:spcAft>
+                  <a:spcPts val="200"/>
+                </a:spcAft>
+              </a:pPr>
+              <a:r>
+                <a:rPr sz="1400" b="1" dirty="0">
+                  <a:solidFill>
+                    <a:srgbClr val="D86B00"/>
+                  </a:solidFill>
+                  <a:latin typeface="Times New Roman" panose="02020603050405020304" pitchFamily="18" charset="0"/>
+                  <a:cs typeface="Times New Roman" panose="02020603050405020304" pitchFamily="18" charset="0"/>
+                </a:rPr>
+                <a:t>B7–B9 Feedback Adequacy</a:t>
+              </a:r>
+            </a:p>
+            <a:p>
+              <a:pPr algn="l">
+                <a:spcBef>
+                  <a:spcPts val="0"/>
+                </a:spcBef>
+                <a:spcAft>
+                  <a:spcPts val="200"/>
+                </a:spcAft>
+              </a:pPr>
+              <a:r>
+                <a:rPr sz="1400" b="0" dirty="0">
+                  <a:solidFill>
+                    <a:srgbClr val="4A515A"/>
+                  </a:solidFill>
+                  <a:latin typeface="Times New Roman" panose="02020603050405020304" pitchFamily="18" charset="0"/>
+                  <a:cs typeface="Times New Roman" panose="02020603050405020304" pitchFamily="18" charset="0"/>
+                </a:rPr>
+                <a:t>Limited feedback and irreversible actions reduce confidence.</a:t>
+              </a:r>
+            </a:p>
+          </p:txBody>
+        </p:sp>
+        <p:sp>
+          <p:nvSpPr>
+            <p:cNvPr id="30" name="Rounded Rectangle 29"/>
+            <p:cNvSpPr/>
+            <p:nvPr/>
+          </p:nvSpPr>
+          <p:spPr>
+            <a:xfrm>
+              <a:off x="156024" y="4198085"/>
+              <a:ext cx="3017093" cy="1078415"/>
+            </a:xfrm>
+            <a:prstGeom prst="roundRect">
+              <a:avLst>
+                <a:gd name="adj" fmla="val 6000"/>
+              </a:avLst>
+            </a:prstGeom>
+            <a:solidFill>
+              <a:srgbClr val="EFEBF3"/>
+            </a:solidFill>
+            <a:ln w="28575">
+              <a:solidFill>
+                <a:schemeClr val="tx1"/>
+              </a:solidFill>
+            </a:ln>
+            <a:effectLst/>
+          </p:spPr>
+          <p:style>
+            <a:lnRef idx="1">
+              <a:schemeClr val="accent1"/>
+            </a:lnRef>
+            <a:fillRef idx="3">
+              <a:schemeClr val="accent1"/>
+            </a:fillRef>
+            <a:effectRef idx="2">
+              <a:schemeClr val="accent1"/>
+            </a:effectRef>
+            <a:fontRef idx="minor">
+              <a:schemeClr val="lt1"/>
+            </a:fontRef>
+          </p:style>
+          <p:txBody>
+            <a:bodyPr wrap="square" lIns="128016" tIns="91440" rIns="128016" bIns="91440" rtlCol="0" anchor="t"/>
+            <a:lstStyle/>
+            <a:p>
+              <a:pPr algn="l">
+                <a:spcBef>
+                  <a:spcPts val="0"/>
+                </a:spcBef>
+                <a:spcAft>
+                  <a:spcPts val="200"/>
+                </a:spcAft>
+              </a:pPr>
+              <a:r>
+                <a:rPr sz="1400" b="1" dirty="0">
+                  <a:solidFill>
+                    <a:srgbClr val="5E1F8C"/>
+                  </a:solidFill>
+                  <a:latin typeface="Times New Roman" panose="02020603050405020304" pitchFamily="18" charset="0"/>
+                  <a:cs typeface="Times New Roman" panose="02020603050405020304" pitchFamily="18" charset="0"/>
+                </a:rPr>
+                <a:t>B10–B12 · Assistive Technology</a:t>
+              </a:r>
+            </a:p>
+            <a:p>
+              <a:pPr algn="l">
+                <a:spcBef>
+                  <a:spcPts val="0"/>
+                </a:spcBef>
+                <a:spcAft>
+                  <a:spcPts val="200"/>
+                </a:spcAft>
+              </a:pPr>
+              <a:r>
+                <a:rPr sz="1400" b="0" dirty="0">
+                  <a:solidFill>
+                    <a:srgbClr val="4A515A"/>
+                  </a:solidFill>
+                  <a:latin typeface="Times New Roman" panose="02020603050405020304" pitchFamily="18" charset="0"/>
+                  <a:cs typeface="Times New Roman" panose="02020603050405020304" pitchFamily="18" charset="0"/>
+                </a:rPr>
+                <a:t>Limited assistive-technology support restricts accessibility.</a:t>
+              </a:r>
+            </a:p>
+          </p:txBody>
+        </p:sp>
+      </p:grpSp>
+      <p:sp>
+        <p:nvSpPr>
+          <p:cNvPr id="7" name="Rounded Rectangle 6"/>
+          <p:cNvSpPr/>
+          <p:nvPr/>
+        </p:nvSpPr>
+        <p:spPr>
+          <a:xfrm>
+            <a:off x="3325998" y="970755"/>
+            <a:ext cx="2858238" cy="1069507"/>
+          </a:xfrm>
+          <a:prstGeom prst="roundRect">
+            <a:avLst>
+              <a:gd name="adj" fmla="val 6000"/>
+            </a:avLst>
+          </a:prstGeom>
+          <a:solidFill>
+            <a:srgbClr val="FFFFFF"/>
+          </a:solidFill>
+          <a:ln w="28575">
+            <a:solidFill>
+              <a:schemeClr val="tx1"/>
+            </a:solidFill>
+          </a:ln>
+          <a:effectLst/>
+        </p:spPr>
+        <p:style>
+          <a:lnRef idx="1">
+            <a:schemeClr val="accent1"/>
+          </a:lnRef>
+          <a:fillRef idx="3">
+            <a:schemeClr val="accent1"/>
+          </a:fillRef>
+          <a:effectRef idx="2">
+            <a:schemeClr val="accent1"/>
+          </a:effectRef>
+          <a:fontRef idx="minor">
+            <a:schemeClr val="lt1"/>
+          </a:fontRef>
+        </p:style>
+        <p:txBody>
+          <a:bodyPr wrap="square" lIns="128016" tIns="91440" rIns="128016" bIns="91440" rtlCol="0" anchor="t"/>
+          <a:lstStyle/>
+          <a:p>
+            <a:pPr algn="l">
+              <a:spcBef>
+                <a:spcPts val="0"/>
+              </a:spcBef>
+              <a:spcAft>
+                <a:spcPts val="200"/>
+              </a:spcAft>
+            </a:pPr>
+            <a:r>
+              <a:rPr sz="1400" b="1" dirty="0">
+                <a:solidFill>
+                  <a:srgbClr val="004B9E"/>
+                </a:solidFill>
+                <a:latin typeface="Times New Roman" panose="02020603050405020304" pitchFamily="18" charset="0"/>
+                <a:cs typeface="Times New Roman" panose="02020603050405020304" pitchFamily="18" charset="0"/>
+              </a:rPr>
+              <a:t>AAD</a:t>
+            </a:r>
+          </a:p>
+          <a:p>
+            <a:pPr algn="l">
+              <a:spcBef>
+                <a:spcPts val="0"/>
+              </a:spcBef>
+              <a:spcAft>
+                <a:spcPts val="200"/>
+              </a:spcAft>
+            </a:pPr>
+            <a:r>
+              <a:rPr sz="1400" b="1" dirty="0">
+                <a:solidFill>
+                  <a:srgbClr val="20242A"/>
+                </a:solidFill>
+                <a:latin typeface="Times New Roman" panose="02020603050405020304" pitchFamily="18" charset="0"/>
+                <a:cs typeface="Times New Roman" panose="02020603050405020304" pitchFamily="18" charset="0"/>
+              </a:rPr>
+              <a:t>Abstracted Authentication Design</a:t>
+            </a:r>
+          </a:p>
+          <a:p>
+            <a:pPr algn="l">
+              <a:spcBef>
+                <a:spcPts val="0"/>
+              </a:spcBef>
+              <a:spcAft>
+                <a:spcPts val="200"/>
+              </a:spcAft>
+            </a:pPr>
+            <a:r>
+              <a:rPr sz="1400" b="0" dirty="0">
+                <a:solidFill>
+                  <a:srgbClr val="4A515A"/>
+                </a:solidFill>
+                <a:latin typeface="Times New Roman" panose="02020603050405020304" pitchFamily="18" charset="0"/>
+                <a:cs typeface="Times New Roman" panose="02020603050405020304" pitchFamily="18" charset="0"/>
+              </a:rPr>
+              <a:t>Simplify secure authentication.</a:t>
+            </a:r>
+          </a:p>
+        </p:txBody>
+      </p:sp>
+      <p:sp>
+        <p:nvSpPr>
+          <p:cNvPr id="15" name="Rounded Rectangle 14"/>
+          <p:cNvSpPr/>
+          <p:nvPr/>
+        </p:nvSpPr>
+        <p:spPr>
+          <a:xfrm>
+            <a:off x="3325998" y="2158557"/>
+            <a:ext cx="2858238" cy="1001238"/>
+          </a:xfrm>
+          <a:prstGeom prst="roundRect">
+            <a:avLst>
+              <a:gd name="adj" fmla="val 6000"/>
+            </a:avLst>
+          </a:prstGeom>
+          <a:solidFill>
+            <a:srgbClr val="FFFFFF"/>
+          </a:solidFill>
+          <a:ln w="28575">
+            <a:solidFill>
+              <a:schemeClr val="tx1"/>
+            </a:solidFill>
+          </a:ln>
+          <a:effectLst/>
+        </p:spPr>
+        <p:style>
+          <a:lnRef idx="1">
+            <a:schemeClr val="accent1"/>
+          </a:lnRef>
+          <a:fillRef idx="3">
+            <a:schemeClr val="accent1"/>
+          </a:fillRef>
+          <a:effectRef idx="2">
+            <a:schemeClr val="accent1"/>
+          </a:effectRef>
+          <a:fontRef idx="minor">
+            <a:schemeClr val="lt1"/>
+          </a:fontRef>
+        </p:style>
+        <p:txBody>
+          <a:bodyPr wrap="square" lIns="128016" tIns="91440" rIns="128016" bIns="91440" rtlCol="0" anchor="t"/>
+          <a:lstStyle/>
+          <a:p>
+            <a:pPr algn="l">
+              <a:spcBef>
+                <a:spcPts val="0"/>
+              </a:spcBef>
+              <a:spcAft>
+                <a:spcPts val="200"/>
+              </a:spcAft>
+            </a:pPr>
+            <a:r>
+              <a:rPr lang="en-US" sz="1400" b="1" dirty="0">
+                <a:solidFill>
+                  <a:srgbClr val="0B6A3A"/>
+                </a:solidFill>
+                <a:latin typeface="Times New Roman" panose="02020603050405020304" pitchFamily="18" charset="0"/>
+                <a:cs typeface="Times New Roman" panose="02020603050405020304" pitchFamily="18" charset="0"/>
+              </a:rPr>
+              <a:t> </a:t>
+            </a:r>
+            <a:r>
+              <a:rPr sz="1400" b="1" dirty="0">
+                <a:solidFill>
+                  <a:srgbClr val="0B6A3A"/>
+                </a:solidFill>
+                <a:latin typeface="Times New Roman" panose="02020603050405020304" pitchFamily="18" charset="0"/>
+                <a:cs typeface="Times New Roman" panose="02020603050405020304" pitchFamily="18" charset="0"/>
+              </a:rPr>
+              <a:t>PTD</a:t>
+            </a:r>
+          </a:p>
+          <a:p>
+            <a:pPr algn="l">
+              <a:spcBef>
+                <a:spcPts val="0"/>
+              </a:spcBef>
+              <a:spcAft>
+                <a:spcPts val="200"/>
+              </a:spcAft>
+            </a:pPr>
+            <a:r>
+              <a:rPr sz="1400" b="1" dirty="0">
+                <a:solidFill>
+                  <a:srgbClr val="20242A"/>
+                </a:solidFill>
+                <a:latin typeface="Times New Roman" panose="02020603050405020304" pitchFamily="18" charset="0"/>
+                <a:cs typeface="Times New Roman" panose="02020603050405020304" pitchFamily="18" charset="0"/>
+              </a:rPr>
+              <a:t>Progressive Transparency Design</a:t>
+            </a:r>
+          </a:p>
+          <a:p>
+            <a:pPr algn="l">
+              <a:spcBef>
+                <a:spcPts val="0"/>
+              </a:spcBef>
+              <a:spcAft>
+                <a:spcPts val="200"/>
+              </a:spcAft>
+            </a:pPr>
+            <a:r>
+              <a:rPr sz="1400" b="0" dirty="0">
+                <a:solidFill>
+                  <a:srgbClr val="4A515A"/>
+                </a:solidFill>
+                <a:latin typeface="Times New Roman" panose="02020603050405020304" pitchFamily="18" charset="0"/>
+                <a:cs typeface="Times New Roman" panose="02020603050405020304" pitchFamily="18" charset="0"/>
+              </a:rPr>
+              <a:t>Present information progressively.</a:t>
+            </a:r>
+          </a:p>
+        </p:txBody>
+      </p:sp>
+      <p:sp>
+        <p:nvSpPr>
+          <p:cNvPr id="23" name="Rounded Rectangle 22"/>
+          <p:cNvSpPr/>
+          <p:nvPr/>
+        </p:nvSpPr>
+        <p:spPr>
+          <a:xfrm>
+            <a:off x="3317819" y="3248817"/>
+            <a:ext cx="2858238" cy="1113800"/>
+          </a:xfrm>
+          <a:prstGeom prst="roundRect">
+            <a:avLst>
+              <a:gd name="adj" fmla="val 6000"/>
+            </a:avLst>
+          </a:prstGeom>
+          <a:solidFill>
+            <a:srgbClr val="FFFFFF"/>
+          </a:solidFill>
+          <a:ln w="28575">
+            <a:solidFill>
+              <a:schemeClr val="tx1"/>
+            </a:solidFill>
+          </a:ln>
+          <a:effectLst/>
+        </p:spPr>
+        <p:style>
+          <a:lnRef idx="1">
+            <a:schemeClr val="accent1"/>
+          </a:lnRef>
+          <a:fillRef idx="3">
+            <a:schemeClr val="accent1"/>
+          </a:fillRef>
+          <a:effectRef idx="2">
+            <a:schemeClr val="accent1"/>
+          </a:effectRef>
+          <a:fontRef idx="minor">
+            <a:schemeClr val="lt1"/>
+          </a:fontRef>
+        </p:style>
+        <p:txBody>
+          <a:bodyPr wrap="square" lIns="128016" tIns="91440" rIns="128016" bIns="91440" rtlCol="0" anchor="t"/>
+          <a:lstStyle/>
+          <a:p>
+            <a:pPr algn="l">
+              <a:spcBef>
+                <a:spcPts val="0"/>
+              </a:spcBef>
+              <a:spcAft>
+                <a:spcPts val="200"/>
+              </a:spcAft>
+            </a:pPr>
+            <a:r>
+              <a:rPr lang="en-US" sz="1400" b="1" dirty="0">
+                <a:solidFill>
+                  <a:srgbClr val="A9772F"/>
+                </a:solidFill>
+                <a:latin typeface="Times New Roman" panose="02020603050405020304" pitchFamily="18" charset="0"/>
+                <a:cs typeface="Times New Roman" panose="02020603050405020304" pitchFamily="18" charset="0"/>
+              </a:rPr>
+              <a:t> </a:t>
+            </a:r>
+            <a:r>
+              <a:rPr sz="1400" b="1" dirty="0">
+                <a:solidFill>
+                  <a:srgbClr val="D86B00"/>
+                </a:solidFill>
+                <a:latin typeface="Times New Roman" panose="02020603050405020304" pitchFamily="18" charset="0"/>
+                <a:cs typeface="Times New Roman" panose="02020603050405020304" pitchFamily="18" charset="0"/>
+              </a:rPr>
+              <a:t>CID</a:t>
+            </a:r>
+          </a:p>
+          <a:p>
+            <a:pPr algn="l">
+              <a:spcBef>
+                <a:spcPts val="0"/>
+              </a:spcBef>
+              <a:spcAft>
+                <a:spcPts val="200"/>
+              </a:spcAft>
+            </a:pPr>
+            <a:r>
+              <a:rPr sz="1400" b="1" dirty="0">
+                <a:solidFill>
+                  <a:srgbClr val="20242A"/>
+                </a:solidFill>
+                <a:latin typeface="Times New Roman" panose="02020603050405020304" pitchFamily="18" charset="0"/>
+                <a:cs typeface="Times New Roman" panose="02020603050405020304" pitchFamily="18" charset="0"/>
+              </a:rPr>
+              <a:t>Confirmatory Interaction Design</a:t>
+            </a:r>
+          </a:p>
+          <a:p>
+            <a:pPr algn="l">
+              <a:spcBef>
+                <a:spcPts val="0"/>
+              </a:spcBef>
+              <a:spcAft>
+                <a:spcPts val="200"/>
+              </a:spcAft>
+            </a:pPr>
+            <a:r>
+              <a:rPr sz="1400" b="0" dirty="0">
+                <a:solidFill>
+                  <a:srgbClr val="4A515A"/>
+                </a:solidFill>
+                <a:latin typeface="Times New Roman" panose="02020603050405020304" pitchFamily="18" charset="0"/>
+                <a:cs typeface="Times New Roman" panose="02020603050405020304" pitchFamily="18" charset="0"/>
+              </a:rPr>
+              <a:t>Prevent errors through clear confirmations.</a:t>
+            </a:r>
+          </a:p>
+        </p:txBody>
+      </p:sp>
+      <p:sp>
+        <p:nvSpPr>
+          <p:cNvPr id="31" name="Rounded Rectangle 30"/>
+          <p:cNvSpPr/>
+          <p:nvPr/>
+        </p:nvSpPr>
+        <p:spPr>
+          <a:xfrm>
+            <a:off x="3333585" y="4546635"/>
+            <a:ext cx="2858238" cy="1103943"/>
+          </a:xfrm>
+          <a:prstGeom prst="roundRect">
+            <a:avLst>
+              <a:gd name="adj" fmla="val 6000"/>
+            </a:avLst>
+          </a:prstGeom>
+          <a:solidFill>
+            <a:srgbClr val="FFFFFF"/>
+          </a:solidFill>
+          <a:ln w="28575">
+            <a:solidFill>
+              <a:schemeClr val="tx1"/>
+            </a:solidFill>
+          </a:ln>
+          <a:effectLst/>
+        </p:spPr>
+        <p:style>
+          <a:lnRef idx="1">
+            <a:schemeClr val="accent1"/>
+          </a:lnRef>
+          <a:fillRef idx="3">
+            <a:schemeClr val="accent1"/>
+          </a:fillRef>
+          <a:effectRef idx="2">
+            <a:schemeClr val="accent1"/>
+          </a:effectRef>
+          <a:fontRef idx="minor">
+            <a:schemeClr val="lt1"/>
+          </a:fontRef>
+        </p:style>
+        <p:txBody>
+          <a:bodyPr wrap="square" lIns="128016" tIns="91440" rIns="128016" bIns="91440" rtlCol="0" anchor="t"/>
+          <a:lstStyle/>
+          <a:p>
+            <a:pPr algn="l">
+              <a:spcBef>
+                <a:spcPts val="0"/>
+              </a:spcBef>
+              <a:spcAft>
+                <a:spcPts val="200"/>
+              </a:spcAft>
+            </a:pPr>
+            <a:r>
+              <a:rPr sz="1400" b="1" dirty="0">
+                <a:solidFill>
+                  <a:srgbClr val="5E1F8C"/>
+                </a:solidFill>
+                <a:latin typeface="Times New Roman" panose="02020603050405020304" pitchFamily="18" charset="0"/>
+                <a:cs typeface="Times New Roman" panose="02020603050405020304" pitchFamily="18" charset="0"/>
+              </a:rPr>
+              <a:t>UAC</a:t>
+            </a:r>
+          </a:p>
+          <a:p>
+            <a:pPr algn="l">
+              <a:spcBef>
+                <a:spcPts val="0"/>
+              </a:spcBef>
+              <a:spcAft>
+                <a:spcPts val="200"/>
+              </a:spcAft>
+            </a:pPr>
+            <a:r>
+              <a:rPr sz="1400" b="1" dirty="0">
+                <a:solidFill>
+                  <a:srgbClr val="20242A"/>
+                </a:solidFill>
+                <a:latin typeface="Times New Roman" panose="02020603050405020304" pitchFamily="18" charset="0"/>
+                <a:cs typeface="Times New Roman" panose="02020603050405020304" pitchFamily="18" charset="0"/>
+              </a:rPr>
+              <a:t>Universal Assistive</a:t>
+            </a:r>
+            <a:r>
+              <a:rPr lang="en-US" sz="1400" b="1" dirty="0">
+                <a:solidFill>
+                  <a:srgbClr val="20242A"/>
+                </a:solidFill>
+                <a:latin typeface="Times New Roman" panose="02020603050405020304" pitchFamily="18" charset="0"/>
+                <a:cs typeface="Times New Roman" panose="02020603050405020304" pitchFamily="18" charset="0"/>
+              </a:rPr>
+              <a:t> </a:t>
+            </a:r>
+            <a:r>
+              <a:rPr sz="1400" b="1" dirty="0">
+                <a:solidFill>
+                  <a:srgbClr val="20242A"/>
+                </a:solidFill>
+                <a:latin typeface="Times New Roman" panose="02020603050405020304" pitchFamily="18" charset="0"/>
+                <a:cs typeface="Times New Roman" panose="02020603050405020304" pitchFamily="18" charset="0"/>
+              </a:rPr>
+              <a:t>Compatibility</a:t>
+            </a:r>
+          </a:p>
+          <a:p>
+            <a:pPr algn="l">
+              <a:spcBef>
+                <a:spcPts val="0"/>
+              </a:spcBef>
+              <a:spcAft>
+                <a:spcPts val="200"/>
+              </a:spcAft>
+            </a:pPr>
+            <a:r>
+              <a:rPr sz="1400" b="0" dirty="0">
+                <a:solidFill>
+                  <a:srgbClr val="4A515A"/>
+                </a:solidFill>
+                <a:latin typeface="Times New Roman" panose="02020603050405020304" pitchFamily="18" charset="0"/>
+                <a:cs typeface="Times New Roman" panose="02020603050405020304" pitchFamily="18" charset="0"/>
+              </a:rPr>
+              <a:t>Support assistive technologies and standards.</a:t>
+            </a:r>
+          </a:p>
+        </p:txBody>
+      </p:sp>
+      <p:sp>
+        <p:nvSpPr>
+          <p:cNvPr id="8" name="Rounded Rectangle 7"/>
+          <p:cNvSpPr/>
+          <p:nvPr/>
+        </p:nvSpPr>
+        <p:spPr>
+          <a:xfrm>
+            <a:off x="6443026" y="997237"/>
+            <a:ext cx="2590735" cy="1040153"/>
+          </a:xfrm>
+          <a:prstGeom prst="roundRect">
+            <a:avLst>
+              <a:gd name="adj" fmla="val 6000"/>
+            </a:avLst>
+          </a:prstGeom>
+          <a:solidFill>
+            <a:srgbClr val="EAF0F5"/>
+          </a:solidFill>
+          <a:ln w="28575">
+            <a:solidFill>
+              <a:schemeClr val="tx1"/>
+            </a:solidFill>
+          </a:ln>
+          <a:effectLst/>
+        </p:spPr>
+        <p:style>
+          <a:lnRef idx="1">
+            <a:schemeClr val="accent1"/>
+          </a:lnRef>
+          <a:fillRef idx="3">
+            <a:schemeClr val="accent1"/>
+          </a:fillRef>
+          <a:effectRef idx="2">
+            <a:schemeClr val="accent1"/>
+          </a:effectRef>
+          <a:fontRef idx="minor">
+            <a:schemeClr val="lt1"/>
+          </a:fontRef>
+        </p:style>
+        <p:txBody>
+          <a:bodyPr wrap="square" lIns="164592" tIns="54864" rIns="164592" bIns="54864" rtlCol="0" anchor="ctr"/>
+          <a:lstStyle/>
+          <a:p>
+            <a:pPr marL="171450" indent="-171450" algn="l">
+              <a:spcBef>
+                <a:spcPts val="0"/>
+              </a:spcBef>
+              <a:spcAft>
+                <a:spcPts val="200"/>
+              </a:spcAft>
+              <a:buFont typeface="Arial" panose="020B0604020202020204" pitchFamily="34" charset="0"/>
+              <a:buChar char="•"/>
+            </a:pPr>
+            <a:r>
+              <a:rPr sz="1400" b="0" dirty="0">
+                <a:solidFill>
+                  <a:srgbClr val="20242A"/>
+                </a:solidFill>
+                <a:latin typeface="Times New Roman" panose="02020603050405020304" pitchFamily="18" charset="0"/>
+                <a:cs typeface="Times New Roman" panose="02020603050405020304" pitchFamily="18" charset="0"/>
+              </a:rPr>
+              <a:t>  Reduce cognitive effort</a:t>
+            </a:r>
+          </a:p>
+          <a:p>
+            <a:pPr marL="171450" indent="-171450" algn="l">
+              <a:spcBef>
+                <a:spcPts val="0"/>
+              </a:spcBef>
+              <a:spcAft>
+                <a:spcPts val="200"/>
+              </a:spcAft>
+              <a:buFont typeface="Arial" panose="020B0604020202020204" pitchFamily="34" charset="0"/>
+              <a:buChar char="•"/>
+            </a:pPr>
+            <a:r>
+              <a:rPr sz="1400" b="0" dirty="0">
+                <a:solidFill>
+                  <a:srgbClr val="20242A"/>
+                </a:solidFill>
+                <a:latin typeface="Times New Roman" panose="02020603050405020304" pitchFamily="18" charset="0"/>
+                <a:cs typeface="Times New Roman" panose="02020603050405020304" pitchFamily="18" charset="0"/>
+              </a:rPr>
+              <a:t>  Inclusive authentication</a:t>
+            </a:r>
+          </a:p>
+          <a:p>
+            <a:pPr marL="171450" indent="-171450" algn="l">
+              <a:spcBef>
+                <a:spcPts val="0"/>
+              </a:spcBef>
+              <a:spcAft>
+                <a:spcPts val="200"/>
+              </a:spcAft>
+              <a:buFont typeface="Arial" panose="020B0604020202020204" pitchFamily="34" charset="0"/>
+              <a:buChar char="•"/>
+            </a:pPr>
+            <a:r>
+              <a:rPr sz="1400" b="0" dirty="0">
+                <a:solidFill>
+                  <a:srgbClr val="20242A"/>
+                </a:solidFill>
+                <a:latin typeface="Times New Roman" panose="02020603050405020304" pitchFamily="18" charset="0"/>
+                <a:cs typeface="Times New Roman" panose="02020603050405020304" pitchFamily="18" charset="0"/>
+              </a:rPr>
+              <a:t>  Adaptive sessions</a:t>
+            </a:r>
+          </a:p>
+        </p:txBody>
+      </p:sp>
+      <p:sp>
+        <p:nvSpPr>
+          <p:cNvPr id="16" name="Rounded Rectangle 15"/>
+          <p:cNvSpPr/>
+          <p:nvPr/>
+        </p:nvSpPr>
+        <p:spPr>
+          <a:xfrm>
+            <a:off x="6452321" y="2157113"/>
+            <a:ext cx="2590735" cy="993289"/>
+          </a:xfrm>
+          <a:prstGeom prst="roundRect">
+            <a:avLst>
+              <a:gd name="adj" fmla="val 6000"/>
+            </a:avLst>
+          </a:prstGeom>
+          <a:solidFill>
+            <a:srgbClr val="E9F2EE"/>
+          </a:solidFill>
+          <a:ln w="28575">
+            <a:solidFill>
+              <a:schemeClr val="tx1"/>
+            </a:solidFill>
+          </a:ln>
+          <a:effectLst/>
+        </p:spPr>
+        <p:style>
+          <a:lnRef idx="1">
+            <a:schemeClr val="accent1"/>
+          </a:lnRef>
+          <a:fillRef idx="3">
+            <a:schemeClr val="accent1"/>
+          </a:fillRef>
+          <a:effectRef idx="2">
+            <a:schemeClr val="accent1"/>
+          </a:effectRef>
+          <a:fontRef idx="minor">
+            <a:schemeClr val="lt1"/>
+          </a:fontRef>
+        </p:style>
+        <p:txBody>
+          <a:bodyPr wrap="square" lIns="164592" tIns="54864" rIns="164592" bIns="54864" rtlCol="0" anchor="ctr"/>
+          <a:lstStyle/>
+          <a:p>
+            <a:pPr marL="285750" indent="-285750" algn="l">
+              <a:spcBef>
+                <a:spcPts val="0"/>
+              </a:spcBef>
+              <a:spcAft>
+                <a:spcPts val="200"/>
+              </a:spcAft>
+              <a:buFont typeface="Arial" panose="020B0604020202020204" pitchFamily="34" charset="0"/>
+              <a:buChar char="•"/>
+            </a:pPr>
+            <a:r>
+              <a:rPr sz="1400" b="0" dirty="0">
+                <a:solidFill>
+                  <a:srgbClr val="20242A"/>
+                </a:solidFill>
+                <a:latin typeface="Times New Roman" panose="02020603050405020304" pitchFamily="18" charset="0"/>
+                <a:cs typeface="Times New Roman" panose="02020603050405020304" pitchFamily="18" charset="0"/>
+              </a:rPr>
+              <a:t>Improve system</a:t>
+            </a:r>
+            <a:r>
+              <a:rPr lang="en-US" sz="1400" b="0" dirty="0">
+                <a:solidFill>
+                  <a:srgbClr val="20242A"/>
+                </a:solidFill>
+                <a:latin typeface="Times New Roman" panose="02020603050405020304" pitchFamily="18" charset="0"/>
+                <a:cs typeface="Times New Roman" panose="02020603050405020304" pitchFamily="18" charset="0"/>
+              </a:rPr>
+              <a:t> </a:t>
+            </a:r>
+            <a:r>
+              <a:rPr sz="1400" b="0" dirty="0">
+                <a:solidFill>
+                  <a:srgbClr val="20242A"/>
+                </a:solidFill>
+                <a:latin typeface="Times New Roman" panose="02020603050405020304" pitchFamily="18" charset="0"/>
+                <a:cs typeface="Times New Roman" panose="02020603050405020304" pitchFamily="18" charset="0"/>
+              </a:rPr>
+              <a:t>transparency</a:t>
+            </a:r>
+          </a:p>
+          <a:p>
+            <a:pPr marL="171450" indent="-171450" algn="l">
+              <a:spcBef>
+                <a:spcPts val="0"/>
+              </a:spcBef>
+              <a:spcAft>
+                <a:spcPts val="200"/>
+              </a:spcAft>
+              <a:buFont typeface="Arial" panose="020B0604020202020204" pitchFamily="34" charset="0"/>
+              <a:buChar char="•"/>
+            </a:pPr>
+            <a:r>
+              <a:rPr sz="1400" b="0" dirty="0">
+                <a:solidFill>
+                  <a:srgbClr val="20242A"/>
+                </a:solidFill>
+                <a:latin typeface="Times New Roman" panose="02020603050405020304" pitchFamily="18" charset="0"/>
+                <a:cs typeface="Times New Roman" panose="02020603050405020304" pitchFamily="18" charset="0"/>
+              </a:rPr>
+              <a:t>  Reduce cognitive load</a:t>
+            </a:r>
+          </a:p>
+          <a:p>
+            <a:pPr marL="171450" indent="-171450" algn="l">
+              <a:spcBef>
+                <a:spcPts val="0"/>
+              </a:spcBef>
+              <a:spcAft>
+                <a:spcPts val="200"/>
+              </a:spcAft>
+              <a:buFont typeface="Arial" panose="020B0604020202020204" pitchFamily="34" charset="0"/>
+              <a:buChar char="•"/>
+            </a:pPr>
+            <a:r>
+              <a:rPr sz="1400" b="0" dirty="0">
+                <a:solidFill>
+                  <a:srgbClr val="20242A"/>
+                </a:solidFill>
+                <a:latin typeface="Times New Roman" panose="02020603050405020304" pitchFamily="18" charset="0"/>
+                <a:cs typeface="Times New Roman" panose="02020603050405020304" pitchFamily="18" charset="0"/>
+              </a:rPr>
+              <a:t>  Transparent consent</a:t>
+            </a:r>
+          </a:p>
+        </p:txBody>
+      </p:sp>
+      <p:sp>
+        <p:nvSpPr>
+          <p:cNvPr id="24" name="Rounded Rectangle 23"/>
+          <p:cNvSpPr/>
+          <p:nvPr/>
+        </p:nvSpPr>
+        <p:spPr>
+          <a:xfrm>
+            <a:off x="6452321" y="3274446"/>
+            <a:ext cx="2581440" cy="1088171"/>
+          </a:xfrm>
+          <a:prstGeom prst="roundRect">
+            <a:avLst>
+              <a:gd name="adj" fmla="val 6000"/>
+            </a:avLst>
+          </a:prstGeom>
+          <a:solidFill>
+            <a:srgbClr val="F4EEE2"/>
+          </a:solidFill>
+          <a:ln w="28575">
+            <a:solidFill>
+              <a:schemeClr val="tx1"/>
+            </a:solidFill>
+          </a:ln>
+          <a:effectLst/>
+        </p:spPr>
+        <p:style>
+          <a:lnRef idx="1">
+            <a:schemeClr val="accent1"/>
+          </a:lnRef>
+          <a:fillRef idx="3">
+            <a:schemeClr val="accent1"/>
+          </a:fillRef>
+          <a:effectRef idx="2">
+            <a:schemeClr val="accent1"/>
+          </a:effectRef>
+          <a:fontRef idx="minor">
+            <a:schemeClr val="lt1"/>
+          </a:fontRef>
+        </p:style>
+        <p:txBody>
+          <a:bodyPr wrap="square" lIns="164592" tIns="54864" rIns="164592" bIns="54864" rtlCol="0" anchor="ctr"/>
+          <a:lstStyle/>
+          <a:p>
+            <a:pPr marL="171450" indent="-171450" algn="l">
+              <a:spcBef>
+                <a:spcPts val="0"/>
+              </a:spcBef>
+              <a:spcAft>
+                <a:spcPts val="200"/>
+              </a:spcAft>
+              <a:buFont typeface="Arial" panose="020B0604020202020204" pitchFamily="34" charset="0"/>
+              <a:buChar char="•"/>
+            </a:pPr>
+            <a:r>
+              <a:rPr sz="1400" b="0" dirty="0">
+                <a:solidFill>
+                  <a:srgbClr val="20242A"/>
+                </a:solidFill>
+                <a:latin typeface="Times New Roman" panose="02020603050405020304" pitchFamily="18" charset="0"/>
+                <a:cs typeface="Times New Roman" panose="02020603050405020304" pitchFamily="18" charset="0"/>
+              </a:rPr>
+              <a:t>  Prevent irreversible errors</a:t>
+            </a:r>
+          </a:p>
+          <a:p>
+            <a:pPr marL="171450" indent="-171450" algn="l">
+              <a:spcBef>
+                <a:spcPts val="0"/>
+              </a:spcBef>
+              <a:spcAft>
+                <a:spcPts val="200"/>
+              </a:spcAft>
+              <a:buFont typeface="Arial" panose="020B0604020202020204" pitchFamily="34" charset="0"/>
+              <a:buChar char="•"/>
+            </a:pPr>
+            <a:r>
+              <a:rPr sz="1400" b="0" dirty="0">
+                <a:solidFill>
+                  <a:srgbClr val="20242A"/>
+                </a:solidFill>
+                <a:latin typeface="Times New Roman" panose="02020603050405020304" pitchFamily="18" charset="0"/>
+                <a:cs typeface="Times New Roman" panose="02020603050405020304" pitchFamily="18" charset="0"/>
+              </a:rPr>
+              <a:t>  Improve user control</a:t>
+            </a:r>
+          </a:p>
+          <a:p>
+            <a:pPr marL="171450" indent="-171450" algn="l">
+              <a:spcBef>
+                <a:spcPts val="0"/>
+              </a:spcBef>
+              <a:spcAft>
+                <a:spcPts val="200"/>
+              </a:spcAft>
+              <a:buFont typeface="Arial" panose="020B0604020202020204" pitchFamily="34" charset="0"/>
+              <a:buChar char="•"/>
+            </a:pPr>
+            <a:r>
+              <a:rPr sz="1400" b="0" dirty="0">
+                <a:solidFill>
+                  <a:srgbClr val="20242A"/>
+                </a:solidFill>
+                <a:latin typeface="Times New Roman" panose="02020603050405020304" pitchFamily="18" charset="0"/>
+                <a:cs typeface="Times New Roman" panose="02020603050405020304" pitchFamily="18" charset="0"/>
+              </a:rPr>
+              <a:t>  Clear recovery guidance</a:t>
+            </a:r>
+          </a:p>
+        </p:txBody>
+      </p:sp>
+      <p:sp>
+        <p:nvSpPr>
+          <p:cNvPr id="32" name="Rounded Rectangle 31"/>
+          <p:cNvSpPr/>
+          <p:nvPr/>
+        </p:nvSpPr>
+        <p:spPr>
+          <a:xfrm>
+            <a:off x="6423995" y="4531267"/>
+            <a:ext cx="2619061" cy="1141357"/>
+          </a:xfrm>
+          <a:prstGeom prst="roundRect">
+            <a:avLst>
+              <a:gd name="adj" fmla="val 6000"/>
+            </a:avLst>
+          </a:prstGeom>
+          <a:solidFill>
+            <a:srgbClr val="EFEBF3"/>
+          </a:solidFill>
+          <a:ln w="28575">
+            <a:solidFill>
+              <a:schemeClr val="tx1"/>
+            </a:solidFill>
+          </a:ln>
+          <a:effectLst/>
+        </p:spPr>
+        <p:style>
+          <a:lnRef idx="1">
+            <a:schemeClr val="accent1"/>
+          </a:lnRef>
+          <a:fillRef idx="3">
+            <a:schemeClr val="accent1"/>
+          </a:fillRef>
+          <a:effectRef idx="2">
+            <a:schemeClr val="accent1"/>
+          </a:effectRef>
+          <a:fontRef idx="minor">
+            <a:schemeClr val="lt1"/>
+          </a:fontRef>
+        </p:style>
+        <p:txBody>
+          <a:bodyPr wrap="square" lIns="164592" tIns="54864" rIns="164592" bIns="54864" rtlCol="0" anchor="ctr"/>
+          <a:lstStyle/>
+          <a:p>
+            <a:pPr marL="171450" indent="-171450" algn="l">
+              <a:spcBef>
+                <a:spcPts val="0"/>
+              </a:spcBef>
+              <a:spcAft>
+                <a:spcPts val="200"/>
+              </a:spcAft>
+              <a:buFont typeface="Arial" panose="020B0604020202020204" pitchFamily="34" charset="0"/>
+              <a:buChar char="•"/>
+            </a:pPr>
+            <a:r>
+              <a:rPr sz="1400" b="0" dirty="0">
+                <a:solidFill>
+                  <a:srgbClr val="20242A"/>
+                </a:solidFill>
+                <a:latin typeface="Times New Roman" panose="02020603050405020304" pitchFamily="18" charset="0"/>
+                <a:cs typeface="Times New Roman" panose="02020603050405020304" pitchFamily="18" charset="0"/>
+              </a:rPr>
+              <a:t> Universal accessibility</a:t>
+            </a:r>
+          </a:p>
+          <a:p>
+            <a:pPr marL="171450" indent="-171450" algn="l">
+              <a:spcBef>
+                <a:spcPts val="0"/>
+              </a:spcBef>
+              <a:spcAft>
+                <a:spcPts val="200"/>
+              </a:spcAft>
+              <a:buFont typeface="Arial" panose="020B0604020202020204" pitchFamily="34" charset="0"/>
+              <a:buChar char="•"/>
+            </a:pPr>
+            <a:r>
+              <a:rPr sz="1400" b="0" dirty="0">
+                <a:solidFill>
+                  <a:srgbClr val="20242A"/>
+                </a:solidFill>
+                <a:latin typeface="Times New Roman" panose="02020603050405020304" pitchFamily="18" charset="0"/>
+                <a:cs typeface="Times New Roman" panose="02020603050405020304" pitchFamily="18" charset="0"/>
+              </a:rPr>
+              <a:t> WCAG 2.1 AA compliance</a:t>
+            </a:r>
+          </a:p>
+          <a:p>
+            <a:pPr marL="171450" indent="-171450" algn="l">
+              <a:spcBef>
+                <a:spcPts val="0"/>
+              </a:spcBef>
+              <a:spcAft>
+                <a:spcPts val="200"/>
+              </a:spcAft>
+              <a:buFont typeface="Arial" panose="020B0604020202020204" pitchFamily="34" charset="0"/>
+              <a:buChar char="•"/>
+            </a:pPr>
+            <a:r>
+              <a:rPr sz="1400" b="0" dirty="0">
+                <a:solidFill>
+                  <a:srgbClr val="20242A"/>
+                </a:solidFill>
+                <a:latin typeface="Times New Roman" panose="02020603050405020304" pitchFamily="18" charset="0"/>
+                <a:cs typeface="Times New Roman" panose="02020603050405020304" pitchFamily="18" charset="0"/>
+              </a:rPr>
+              <a:t> Assistive-technology support</a:t>
+            </a:r>
+          </a:p>
+        </p:txBody>
+      </p:sp>
+      <p:sp>
+        <p:nvSpPr>
+          <p:cNvPr id="33" name="Rounded Rectangle 32"/>
+          <p:cNvSpPr/>
+          <p:nvPr/>
+        </p:nvSpPr>
+        <p:spPr>
+          <a:xfrm>
+            <a:off x="9291119" y="4537924"/>
+            <a:ext cx="2698195" cy="1141357"/>
+          </a:xfrm>
+          <a:prstGeom prst="roundRect">
+            <a:avLst>
+              <a:gd name="adj" fmla="val 6000"/>
+            </a:avLst>
+          </a:prstGeom>
+          <a:solidFill>
+            <a:srgbClr val="E4DCEC"/>
+          </a:solidFill>
+          <a:ln w="28575">
+            <a:solidFill>
+              <a:schemeClr val="tx1"/>
+            </a:solidFill>
+          </a:ln>
+          <a:effectLst/>
+        </p:spPr>
+        <p:style>
+          <a:lnRef idx="1">
+            <a:schemeClr val="accent1"/>
+          </a:lnRef>
+          <a:fillRef idx="3">
+            <a:schemeClr val="accent1"/>
+          </a:fillRef>
+          <a:effectRef idx="2">
+            <a:schemeClr val="accent1"/>
+          </a:effectRef>
+          <a:fontRef idx="minor">
+            <a:schemeClr val="lt1"/>
+          </a:fontRef>
+        </p:style>
+        <p:txBody>
+          <a:bodyPr wrap="square" lIns="146304" tIns="91440" rIns="146304" bIns="91440" rtlCol="0" anchor="t"/>
+          <a:lstStyle/>
+          <a:p>
+            <a:pPr>
+              <a:spcAft>
+                <a:spcPts val="200"/>
+              </a:spcAft>
+            </a:pPr>
+            <a:r>
+              <a:rPr lang="en-US" sz="1400" b="1" dirty="0">
+                <a:solidFill>
+                  <a:srgbClr val="5E1F8C"/>
+                </a:solidFill>
+                <a:latin typeface="Times New Roman" panose="02020603050405020304" pitchFamily="18" charset="0"/>
+                <a:cs typeface="Times New Roman" panose="02020603050405020304" pitchFamily="18" charset="0"/>
+              </a:rPr>
+              <a:t>UAC</a:t>
+            </a:r>
+            <a:endParaRPr sz="1400" b="1" dirty="0">
+              <a:solidFill>
+                <a:srgbClr val="5E1F8C"/>
+              </a:solidFill>
+              <a:latin typeface="Times New Roman" panose="02020603050405020304" pitchFamily="18" charset="0"/>
+              <a:cs typeface="Times New Roman" panose="02020603050405020304" pitchFamily="18" charset="0"/>
+            </a:endParaRPr>
+          </a:p>
+          <a:p>
+            <a:pPr algn="l">
+              <a:spcBef>
+                <a:spcPts val="0"/>
+              </a:spcBef>
+              <a:spcAft>
+                <a:spcPts val="200"/>
+              </a:spcAft>
+            </a:pPr>
+            <a:r>
+              <a:rPr sz="1400" b="1" dirty="0">
+                <a:solidFill>
+                  <a:srgbClr val="20242A"/>
+                </a:solidFill>
+                <a:latin typeface="Times New Roman" panose="02020603050405020304" pitchFamily="18" charset="0"/>
+                <a:cs typeface="Times New Roman" panose="02020603050405020304" pitchFamily="18" charset="0"/>
+              </a:rPr>
+              <a:t>Accessible UI &amp; assistive-tech support</a:t>
+            </a:r>
+          </a:p>
+        </p:txBody>
+      </p:sp>
+      <p:grpSp>
+        <p:nvGrpSpPr>
+          <p:cNvPr id="54" name="Group 53">
+            <a:extLst>
+              <a:ext uri="{FF2B5EF4-FFF2-40B4-BE49-F238E27FC236}">
+                <a16:creationId xmlns:a16="http://schemas.microsoft.com/office/drawing/2014/main" id="{907997BC-F7B3-2E8F-EB0D-1E7F9F2FEC50}"/>
+              </a:ext>
+            </a:extLst>
+          </p:cNvPr>
+          <p:cNvGrpSpPr/>
+          <p:nvPr/>
+        </p:nvGrpSpPr>
+        <p:grpSpPr>
+          <a:xfrm>
+            <a:off x="10737712" y="1666368"/>
+            <a:ext cx="948444" cy="3883245"/>
+            <a:chOff x="10931927" y="1358726"/>
+            <a:chExt cx="948444" cy="3883245"/>
+          </a:xfrm>
+        </p:grpSpPr>
+        <p:sp>
+          <p:nvSpPr>
+            <p:cNvPr id="10" name="Rounded Rectangle 9"/>
+            <p:cNvSpPr/>
+            <p:nvPr/>
+          </p:nvSpPr>
+          <p:spPr>
+            <a:xfrm>
+              <a:off x="10931927" y="1358726"/>
+              <a:ext cx="948443" cy="290961"/>
+            </a:xfrm>
+            <a:prstGeom prst="roundRect">
+              <a:avLst>
+                <a:gd name="adj" fmla="val 50000"/>
+              </a:avLst>
+            </a:prstGeom>
+            <a:solidFill>
+              <a:srgbClr val="FFFFFF"/>
+            </a:solidFill>
+            <a:ln w="28575">
+              <a:solidFill>
+                <a:schemeClr val="tx1"/>
+              </a:solidFill>
+            </a:ln>
+            <a:effectLst/>
+          </p:spPr>
+          <p:style>
+            <a:lnRef idx="1">
+              <a:schemeClr val="accent1"/>
+            </a:lnRef>
+            <a:fillRef idx="3">
+              <a:schemeClr val="accent1"/>
+            </a:fillRef>
+            <a:effectRef idx="2">
+              <a:schemeClr val="accent1"/>
+            </a:effectRef>
+            <a:fontRef idx="minor">
+              <a:schemeClr val="lt1"/>
+            </a:fontRef>
+          </p:style>
+          <p:txBody>
+            <a:bodyPr wrap="square" lIns="18288" tIns="0" rIns="18288" bIns="0" rtlCol="0" anchor="ctr"/>
+            <a:lstStyle/>
+            <a:p>
+              <a:pPr algn="ctr">
+                <a:spcAft>
+                  <a:spcPts val="200"/>
+                </a:spcAft>
+              </a:pPr>
+              <a:r>
+                <a:rPr sz="1400" b="1" dirty="0">
+                  <a:solidFill>
+                    <a:srgbClr val="0B6A3A"/>
+                  </a:solidFill>
+                  <a:latin typeface="Times New Roman" panose="02020603050405020304" pitchFamily="18" charset="0"/>
+                  <a:cs typeface="Times New Roman" panose="02020603050405020304" pitchFamily="18" charset="0"/>
+                </a:rPr>
+                <a:t>Layer 2</a:t>
+              </a:r>
+            </a:p>
+          </p:txBody>
+        </p:sp>
+        <p:sp>
+          <p:nvSpPr>
+            <p:cNvPr id="18" name="Rounded Rectangle 17"/>
+            <p:cNvSpPr/>
+            <p:nvPr/>
+          </p:nvSpPr>
+          <p:spPr>
+            <a:xfrm>
+              <a:off x="10931927" y="2513934"/>
+              <a:ext cx="948443" cy="278105"/>
+            </a:xfrm>
+            <a:prstGeom prst="roundRect">
+              <a:avLst>
+                <a:gd name="adj" fmla="val 50000"/>
+              </a:avLst>
+            </a:prstGeom>
+            <a:solidFill>
+              <a:srgbClr val="FFFFFF"/>
+            </a:solidFill>
+            <a:ln w="28575">
+              <a:solidFill>
+                <a:schemeClr val="tx1"/>
+              </a:solidFill>
+            </a:ln>
+            <a:effectLst/>
+          </p:spPr>
+          <p:style>
+            <a:lnRef idx="1">
+              <a:schemeClr val="accent1"/>
+            </a:lnRef>
+            <a:fillRef idx="3">
+              <a:schemeClr val="accent1"/>
+            </a:fillRef>
+            <a:effectRef idx="2">
+              <a:schemeClr val="accent1"/>
+            </a:effectRef>
+            <a:fontRef idx="minor">
+              <a:schemeClr val="lt1"/>
+            </a:fontRef>
+          </p:style>
+          <p:txBody>
+            <a:bodyPr wrap="square" lIns="18288" tIns="0" rIns="18288" bIns="0" rtlCol="0" anchor="ctr"/>
+            <a:lstStyle/>
+            <a:p>
+              <a:pPr algn="ctr">
+                <a:spcBef>
+                  <a:spcPts val="0"/>
+                </a:spcBef>
+                <a:spcAft>
+                  <a:spcPts val="200"/>
+                </a:spcAft>
+              </a:pPr>
+              <a:r>
+                <a:rPr sz="1400" b="1" dirty="0">
+                  <a:solidFill>
+                    <a:srgbClr val="0B6A3A"/>
+                  </a:solidFill>
+                  <a:latin typeface="Times New Roman" panose="02020603050405020304" pitchFamily="18" charset="0"/>
+                  <a:cs typeface="Times New Roman" panose="02020603050405020304" pitchFamily="18" charset="0"/>
+                </a:rPr>
+                <a:t>Layer 2</a:t>
+              </a:r>
+            </a:p>
+          </p:txBody>
+        </p:sp>
+        <p:sp>
+          <p:nvSpPr>
+            <p:cNvPr id="26" name="Rounded Rectangle 25"/>
+            <p:cNvSpPr/>
+            <p:nvPr/>
+          </p:nvSpPr>
+          <p:spPr>
+            <a:xfrm>
+              <a:off x="10931927" y="3649220"/>
+              <a:ext cx="948443" cy="287317"/>
+            </a:xfrm>
+            <a:prstGeom prst="roundRect">
+              <a:avLst>
+                <a:gd name="adj" fmla="val 50000"/>
+              </a:avLst>
+            </a:prstGeom>
+            <a:solidFill>
+              <a:srgbClr val="FFFFFF"/>
+            </a:solidFill>
+            <a:ln w="28575">
+              <a:solidFill>
+                <a:schemeClr val="tx1"/>
+              </a:solidFill>
+            </a:ln>
+            <a:effectLst/>
+          </p:spPr>
+          <p:style>
+            <a:lnRef idx="1">
+              <a:schemeClr val="accent1"/>
+            </a:lnRef>
+            <a:fillRef idx="3">
+              <a:schemeClr val="accent1"/>
+            </a:fillRef>
+            <a:effectRef idx="2">
+              <a:schemeClr val="accent1"/>
+            </a:effectRef>
+            <a:fontRef idx="minor">
+              <a:schemeClr val="lt1"/>
+            </a:fontRef>
+          </p:style>
+          <p:txBody>
+            <a:bodyPr wrap="square" lIns="18288" tIns="0" rIns="18288" bIns="0" rtlCol="0" anchor="ctr"/>
+            <a:lstStyle/>
+            <a:p>
+              <a:pPr algn="ctr">
+                <a:spcBef>
+                  <a:spcPts val="0"/>
+                </a:spcBef>
+                <a:spcAft>
+                  <a:spcPts val="200"/>
+                </a:spcAft>
+              </a:pPr>
+              <a:r>
+                <a:rPr sz="1400" b="1" dirty="0">
+                  <a:solidFill>
+                    <a:srgbClr val="D86B00"/>
+                  </a:solidFill>
+                  <a:latin typeface="Times New Roman" panose="02020603050405020304" pitchFamily="18" charset="0"/>
+                  <a:cs typeface="Times New Roman" panose="02020603050405020304" pitchFamily="18" charset="0"/>
+                </a:rPr>
+                <a:t>Layer</a:t>
+              </a:r>
+              <a:r>
+                <a:rPr sz="1600" b="1" dirty="0">
+                  <a:solidFill>
+                    <a:srgbClr val="A9772F"/>
+                  </a:solidFill>
+                  <a:latin typeface="Times New Roman" panose="02020603050405020304" pitchFamily="18" charset="0"/>
+                  <a:cs typeface="Times New Roman" panose="02020603050405020304" pitchFamily="18" charset="0"/>
+                </a:rPr>
+                <a:t> </a:t>
+              </a:r>
+              <a:r>
+                <a:rPr lang="en-US" sz="1400" b="1" dirty="0">
+                  <a:solidFill>
+                    <a:srgbClr val="D86B00"/>
+                  </a:solidFill>
+                  <a:latin typeface="Times New Roman" panose="02020603050405020304" pitchFamily="18" charset="0"/>
+                  <a:cs typeface="Times New Roman" panose="02020603050405020304" pitchFamily="18" charset="0"/>
+                </a:rPr>
+                <a:t>2</a:t>
+              </a:r>
+              <a:r>
+                <a:rPr lang="en-US" sz="1600" b="1" dirty="0">
+                  <a:solidFill>
+                    <a:srgbClr val="A9772F"/>
+                  </a:solidFill>
+                  <a:latin typeface="Times New Roman" panose="02020603050405020304" pitchFamily="18" charset="0"/>
+                  <a:cs typeface="Times New Roman" panose="02020603050405020304" pitchFamily="18" charset="0"/>
+                </a:rPr>
+                <a:t>-</a:t>
+              </a:r>
+              <a:r>
+                <a:rPr sz="1400" b="1" dirty="0">
+                  <a:solidFill>
+                    <a:srgbClr val="D86B00"/>
+                  </a:solidFill>
+                  <a:latin typeface="Times New Roman" panose="02020603050405020304" pitchFamily="18" charset="0"/>
+                  <a:cs typeface="Times New Roman" panose="02020603050405020304" pitchFamily="18" charset="0"/>
+                </a:rPr>
+                <a:t>3</a:t>
+              </a:r>
+            </a:p>
+          </p:txBody>
+        </p:sp>
+        <p:sp>
+          <p:nvSpPr>
+            <p:cNvPr id="34" name="Rounded Rectangle 33"/>
+            <p:cNvSpPr/>
+            <p:nvPr/>
+          </p:nvSpPr>
+          <p:spPr>
+            <a:xfrm>
+              <a:off x="10931927" y="4939016"/>
+              <a:ext cx="948444" cy="302955"/>
+            </a:xfrm>
+            <a:prstGeom prst="roundRect">
+              <a:avLst>
+                <a:gd name="adj" fmla="val 50000"/>
+              </a:avLst>
+            </a:prstGeom>
+            <a:solidFill>
+              <a:srgbClr val="FFFFFF"/>
+            </a:solidFill>
+            <a:ln w="28575">
+              <a:solidFill>
+                <a:schemeClr val="tx1"/>
+              </a:solidFill>
+            </a:ln>
+            <a:effectLst/>
+          </p:spPr>
+          <p:style>
+            <a:lnRef idx="1">
+              <a:schemeClr val="accent1"/>
+            </a:lnRef>
+            <a:fillRef idx="3">
+              <a:schemeClr val="accent1"/>
+            </a:fillRef>
+            <a:effectRef idx="2">
+              <a:schemeClr val="accent1"/>
+            </a:effectRef>
+            <a:fontRef idx="minor">
+              <a:schemeClr val="lt1"/>
+            </a:fontRef>
+          </p:style>
+          <p:txBody>
+            <a:bodyPr wrap="square" lIns="18288" tIns="0" rIns="18288" bIns="0" rtlCol="0" anchor="ctr"/>
+            <a:lstStyle/>
+            <a:p>
+              <a:pPr algn="ctr">
+                <a:spcBef>
+                  <a:spcPts val="0"/>
+                </a:spcBef>
+                <a:spcAft>
+                  <a:spcPts val="200"/>
+                </a:spcAft>
+              </a:pPr>
+              <a:r>
+                <a:rPr sz="1400" b="1" dirty="0">
+                  <a:solidFill>
+                    <a:srgbClr val="5E1F8C"/>
+                  </a:solidFill>
+                  <a:latin typeface="Times New Roman" panose="02020603050405020304" pitchFamily="18" charset="0"/>
+                  <a:cs typeface="Times New Roman" panose="02020603050405020304" pitchFamily="18" charset="0"/>
+                </a:rPr>
+                <a:t>Layer 1</a:t>
+              </a:r>
+              <a:r>
+                <a:rPr lang="en-US" sz="1400" b="1" dirty="0">
+                  <a:solidFill>
+                    <a:srgbClr val="5E1F8C"/>
+                  </a:solidFill>
+                  <a:latin typeface="Times New Roman" panose="02020603050405020304" pitchFamily="18" charset="0"/>
+                  <a:cs typeface="Times New Roman" panose="02020603050405020304" pitchFamily="18" charset="0"/>
+                </a:rPr>
+                <a:t>-2</a:t>
+              </a:r>
+              <a:endParaRPr sz="1400" b="1" dirty="0">
+                <a:solidFill>
+                  <a:srgbClr val="5E1F8C"/>
+                </a:solidFill>
+                <a:latin typeface="Times New Roman" panose="02020603050405020304" pitchFamily="18" charset="0"/>
+                <a:cs typeface="Times New Roman" panose="02020603050405020304" pitchFamily="18" charset="0"/>
+              </a:endParaRPr>
+            </a:p>
+          </p:txBody>
+        </p:sp>
+      </p:grpSp>
+      <p:sp>
+        <p:nvSpPr>
+          <p:cNvPr id="12" name="Right Arrow 11"/>
+          <p:cNvSpPr/>
+          <p:nvPr/>
+        </p:nvSpPr>
+        <p:spPr>
+          <a:xfrm>
+            <a:off x="6211912" y="1458805"/>
+            <a:ext cx="204770" cy="121916"/>
+          </a:xfrm>
+          <a:prstGeom prst="rightArrow">
+            <a:avLst>
+              <a:gd name="adj1" fmla="val 55000"/>
+              <a:gd name="adj2" fmla="val 55000"/>
+            </a:avLst>
+          </a:prstGeom>
+          <a:ln w="28575">
+            <a:solidFill>
+              <a:schemeClr val="tx1"/>
+            </a:solidFill>
+          </a:ln>
+        </p:spPr>
+        <p:style>
+          <a:lnRef idx="2">
+            <a:schemeClr val="dk1">
+              <a:shade val="15000"/>
+            </a:schemeClr>
+          </a:lnRef>
+          <a:fillRef idx="1">
+            <a:schemeClr val="dk1"/>
+          </a:fillRef>
+          <a:effectRef idx="0">
+            <a:schemeClr val="dk1"/>
+          </a:effectRef>
+          <a:fontRef idx="minor">
+            <a:schemeClr val="lt1"/>
+          </a:fontRef>
+        </p:style>
+        <p:txBody>
+          <a:bodyPr rtlCol="0" anchor="ctr"/>
+          <a:lstStyle/>
+          <a:p>
+            <a:pPr algn="ctr"/>
+            <a:endParaRPr sz="1400">
+              <a:latin typeface="Times New Roman" panose="02020603050405020304" pitchFamily="18" charset="0"/>
+              <a:cs typeface="Times New Roman" panose="02020603050405020304" pitchFamily="18" charset="0"/>
+            </a:endParaRPr>
+          </a:p>
+        </p:txBody>
+      </p:sp>
+      <p:sp>
+        <p:nvSpPr>
+          <p:cNvPr id="20" name="Right Arrow 19"/>
+          <p:cNvSpPr/>
+          <p:nvPr/>
+        </p:nvSpPr>
+        <p:spPr>
+          <a:xfrm>
+            <a:off x="6220458" y="2601776"/>
+            <a:ext cx="204770" cy="121916"/>
+          </a:xfrm>
+          <a:prstGeom prst="rightArrow">
+            <a:avLst>
+              <a:gd name="adj1" fmla="val 55000"/>
+              <a:gd name="adj2" fmla="val 55000"/>
+            </a:avLst>
+          </a:prstGeom>
+          <a:ln w="28575">
+            <a:solidFill>
+              <a:schemeClr val="tx1"/>
+            </a:solidFill>
+          </a:ln>
+        </p:spPr>
+        <p:style>
+          <a:lnRef idx="2">
+            <a:schemeClr val="dk1">
+              <a:shade val="15000"/>
+            </a:schemeClr>
+          </a:lnRef>
+          <a:fillRef idx="1">
+            <a:schemeClr val="dk1"/>
+          </a:fillRef>
+          <a:effectRef idx="0">
+            <a:schemeClr val="dk1"/>
+          </a:effectRef>
+          <a:fontRef idx="minor">
+            <a:schemeClr val="lt1"/>
+          </a:fontRef>
+        </p:style>
+        <p:txBody>
+          <a:bodyPr rtlCol="0" anchor="ctr"/>
+          <a:lstStyle/>
+          <a:p>
+            <a:pPr algn="ctr"/>
+            <a:endParaRPr sz="1400">
+              <a:latin typeface="Times New Roman" panose="02020603050405020304" pitchFamily="18" charset="0"/>
+              <a:cs typeface="Times New Roman" panose="02020603050405020304" pitchFamily="18" charset="0"/>
+            </a:endParaRPr>
+          </a:p>
+        </p:txBody>
+      </p:sp>
+      <p:sp>
+        <p:nvSpPr>
+          <p:cNvPr id="36" name="Right Arrow 35"/>
+          <p:cNvSpPr/>
+          <p:nvPr/>
+        </p:nvSpPr>
+        <p:spPr>
+          <a:xfrm>
+            <a:off x="6211912" y="5024455"/>
+            <a:ext cx="204770" cy="121916"/>
+          </a:xfrm>
+          <a:prstGeom prst="rightArrow">
+            <a:avLst>
+              <a:gd name="adj1" fmla="val 55000"/>
+              <a:gd name="adj2" fmla="val 55000"/>
+            </a:avLst>
+          </a:prstGeom>
+          <a:ln w="28575">
+            <a:solidFill>
+              <a:schemeClr val="tx1"/>
+            </a:solidFill>
+          </a:ln>
+        </p:spPr>
+        <p:style>
+          <a:lnRef idx="2">
+            <a:schemeClr val="dk1">
+              <a:shade val="15000"/>
+            </a:schemeClr>
+          </a:lnRef>
+          <a:fillRef idx="1">
+            <a:schemeClr val="dk1"/>
+          </a:fillRef>
+          <a:effectRef idx="0">
+            <a:schemeClr val="dk1"/>
+          </a:effectRef>
+          <a:fontRef idx="minor">
+            <a:schemeClr val="lt1"/>
+          </a:fontRef>
+        </p:style>
+        <p:txBody>
+          <a:bodyPr rtlCol="0" anchor="ctr"/>
+          <a:lstStyle/>
+          <a:p>
+            <a:pPr algn="ctr"/>
+            <a:endParaRPr sz="1400">
+              <a:latin typeface="Times New Roman" panose="02020603050405020304" pitchFamily="18" charset="0"/>
+              <a:cs typeface="Times New Roman" panose="02020603050405020304" pitchFamily="18" charset="0"/>
+            </a:endParaRPr>
+          </a:p>
+        </p:txBody>
+      </p:sp>
+      <p:sp>
+        <p:nvSpPr>
+          <p:cNvPr id="38" name="Rounded Rectangle 37"/>
+          <p:cNvSpPr/>
+          <p:nvPr/>
+        </p:nvSpPr>
+        <p:spPr>
+          <a:xfrm>
+            <a:off x="165964" y="5801081"/>
+            <a:ext cx="11734506" cy="655303"/>
+          </a:xfrm>
+          <a:prstGeom prst="roundRect">
+            <a:avLst>
+              <a:gd name="adj" fmla="val 6000"/>
+            </a:avLst>
+          </a:prstGeom>
+          <a:solidFill>
+            <a:srgbClr val="F1F3F5"/>
+          </a:solidFill>
+          <a:ln w="28575">
+            <a:solidFill>
+              <a:schemeClr val="tx1"/>
+            </a:solidFill>
+            <a:prstDash val="solid"/>
+          </a:ln>
+          <a:effectLst/>
+        </p:spPr>
+        <p:style>
+          <a:lnRef idx="1">
+            <a:schemeClr val="accent1"/>
+          </a:lnRef>
+          <a:fillRef idx="3">
+            <a:schemeClr val="accent1"/>
+          </a:fillRef>
+          <a:effectRef idx="2">
+            <a:schemeClr val="accent1"/>
+          </a:effectRef>
+          <a:fontRef idx="minor">
+            <a:schemeClr val="lt1"/>
+          </a:fontRef>
+        </p:style>
+        <p:txBody>
+          <a:bodyPr wrap="square" lIns="164592" tIns="54864" rIns="164592" bIns="54864" rtlCol="0" anchor="ctr"/>
+          <a:lstStyle/>
+          <a:p>
+            <a:pPr algn="ctr">
+              <a:spcBef>
+                <a:spcPts val="0"/>
+              </a:spcBef>
+              <a:spcAft>
+                <a:spcPts val="200"/>
+              </a:spcAft>
+            </a:pPr>
+            <a:r>
+              <a:rPr sz="1600" b="1" dirty="0">
+                <a:solidFill>
+                  <a:srgbClr val="004B9E"/>
+                </a:solidFill>
+                <a:latin typeface="Times New Roman" panose="02020603050405020304" pitchFamily="18" charset="0"/>
+                <a:cs typeface="Times New Roman" panose="02020603050405020304" pitchFamily="18" charset="0"/>
+              </a:rPr>
+              <a:t>Legal </a:t>
+            </a:r>
+            <a:r>
+              <a:rPr lang="en-US" sz="1600" b="1" dirty="0">
+                <a:solidFill>
+                  <a:srgbClr val="004B9E"/>
+                </a:solidFill>
+                <a:latin typeface="Times New Roman" panose="02020603050405020304" pitchFamily="18" charset="0"/>
+                <a:cs typeface="Times New Roman" panose="02020603050405020304" pitchFamily="18" charset="0"/>
+              </a:rPr>
+              <a:t>and</a:t>
+            </a:r>
+            <a:r>
+              <a:rPr sz="1600" b="1" dirty="0">
+                <a:solidFill>
+                  <a:srgbClr val="004B9E"/>
+                </a:solidFill>
+                <a:latin typeface="Times New Roman" panose="02020603050405020304" pitchFamily="18" charset="0"/>
+                <a:cs typeface="Times New Roman" panose="02020603050405020304" pitchFamily="18" charset="0"/>
+              </a:rPr>
+              <a:t> Privacy cross-cutting (Governance, P3)</a:t>
+            </a:r>
+          </a:p>
+          <a:p>
+            <a:pPr algn="l">
+              <a:spcBef>
+                <a:spcPts val="0"/>
+              </a:spcBef>
+              <a:spcAft>
+                <a:spcPts val="200"/>
+              </a:spcAft>
+            </a:pPr>
+            <a:r>
+              <a:rPr sz="1600" dirty="0">
+                <a:ln w="0"/>
+                <a:solidFill>
+                  <a:schemeClr val="tx1"/>
+                </a:solidFill>
+                <a:latin typeface="Times New Roman" panose="02020603050405020304" pitchFamily="18" charset="0"/>
+                <a:cs typeface="Times New Roman" panose="02020603050405020304" pitchFamily="18" charset="0"/>
+              </a:rPr>
+              <a:t>Complex consent and privacy requirements reduce trust; addressed across all layers through transparent consent and standards compliance.</a:t>
+            </a:r>
+          </a:p>
+        </p:txBody>
+      </p:sp>
+      <p:sp>
+        <p:nvSpPr>
+          <p:cNvPr id="39" name="TextBox 38"/>
+          <p:cNvSpPr txBox="1"/>
+          <p:nvPr/>
+        </p:nvSpPr>
+        <p:spPr>
+          <a:xfrm>
+            <a:off x="172533" y="6666372"/>
+            <a:ext cx="11734506" cy="283154"/>
           </a:xfrm>
           <a:prstGeom prst="rect">
             <a:avLst/>
           </a:prstGeom>
+          <a:noFill/>
+          <a:ln w="28575">
+            <a:solidFill>
+              <a:schemeClr val="tx1"/>
+            </a:solidFill>
+          </a:ln>
         </p:spPr>
-      </p:pic>
+        <p:txBody>
+          <a:bodyPr wrap="square" lIns="18288" tIns="18288" rIns="18288" bIns="18288" anchor="ctr">
+            <a:spAutoFit/>
+          </a:bodyPr>
+          <a:lstStyle/>
+          <a:p>
+            <a:pPr algn="ctr">
+              <a:spcBef>
+                <a:spcPts val="0"/>
+              </a:spcBef>
+              <a:spcAft>
+                <a:spcPts val="100"/>
+              </a:spcAft>
+            </a:pPr>
+            <a:r>
+              <a:rPr sz="1600" b="1" dirty="0">
+                <a:solidFill>
+                  <a:srgbClr val="004B9E"/>
+                </a:solidFill>
+                <a:latin typeface="Times New Roman" panose="02020603050405020304" pitchFamily="18" charset="0"/>
+                <a:cs typeface="Times New Roman" panose="02020603050405020304" pitchFamily="18" charset="0"/>
+              </a:rPr>
+              <a:t>FOUNDATIONS</a:t>
+            </a:r>
+            <a:r>
+              <a:rPr sz="1400" b="1" dirty="0">
+                <a:solidFill>
+                  <a:srgbClr val="8A7327"/>
+                </a:solidFill>
+                <a:latin typeface="Times New Roman" panose="02020603050405020304" pitchFamily="18" charset="0"/>
+                <a:cs typeface="Times New Roman" panose="02020603050405020304" pitchFamily="18" charset="0"/>
+              </a:rPr>
+              <a:t>  </a:t>
+            </a:r>
+            <a:r>
+              <a:rPr lang="en-US" sz="1600" b="1" dirty="0">
+                <a:solidFill>
+                  <a:srgbClr val="004B9E"/>
+                </a:solidFill>
+                <a:latin typeface="Times New Roman" panose="02020603050405020304" pitchFamily="18" charset="0"/>
+                <a:cs typeface="Times New Roman" panose="02020603050405020304" pitchFamily="18" charset="0"/>
+              </a:rPr>
+              <a:t>AND</a:t>
+            </a:r>
+            <a:r>
+              <a:rPr sz="1400" b="1" dirty="0">
+                <a:solidFill>
+                  <a:srgbClr val="8A7327"/>
+                </a:solidFill>
+                <a:latin typeface="Times New Roman" panose="02020603050405020304" pitchFamily="18" charset="0"/>
+                <a:cs typeface="Times New Roman" panose="02020603050405020304" pitchFamily="18" charset="0"/>
+              </a:rPr>
+              <a:t>  </a:t>
+            </a:r>
+            <a:r>
+              <a:rPr sz="1600" b="1" dirty="0">
+                <a:solidFill>
+                  <a:srgbClr val="004B9E"/>
+                </a:solidFill>
+                <a:latin typeface="Times New Roman" panose="02020603050405020304" pitchFamily="18" charset="0"/>
+                <a:cs typeface="Times New Roman" panose="02020603050405020304" pitchFamily="18" charset="0"/>
+              </a:rPr>
+              <a:t>STANDARDS</a:t>
+            </a:r>
+            <a:r>
+              <a:rPr sz="1400" b="1" dirty="0">
+                <a:solidFill>
+                  <a:srgbClr val="8A7327"/>
+                </a:solidFill>
+                <a:latin typeface="Times New Roman" panose="02020603050405020304" pitchFamily="18" charset="0"/>
+                <a:cs typeface="Times New Roman" panose="02020603050405020304" pitchFamily="18" charset="0"/>
+              </a:rPr>
+              <a:t>  </a:t>
+            </a:r>
+            <a:r>
+              <a:rPr sz="1600" b="1" dirty="0">
+                <a:solidFill>
+                  <a:srgbClr val="004B9E"/>
+                </a:solidFill>
+                <a:latin typeface="Times New Roman" panose="02020603050405020304" pitchFamily="18" charset="0"/>
+                <a:cs typeface="Times New Roman" panose="02020603050405020304" pitchFamily="18" charset="0"/>
+              </a:rPr>
+              <a:t>GUIDING</a:t>
+            </a:r>
+            <a:r>
+              <a:rPr sz="1400" b="1" dirty="0">
+                <a:solidFill>
+                  <a:srgbClr val="8A7327"/>
+                </a:solidFill>
+                <a:latin typeface="Times New Roman" panose="02020603050405020304" pitchFamily="18" charset="0"/>
+                <a:cs typeface="Times New Roman" panose="02020603050405020304" pitchFamily="18" charset="0"/>
+              </a:rPr>
+              <a:t>  </a:t>
+            </a:r>
+            <a:r>
+              <a:rPr sz="1600" b="1" dirty="0">
+                <a:solidFill>
+                  <a:srgbClr val="004B9E"/>
+                </a:solidFill>
+                <a:latin typeface="Times New Roman" panose="02020603050405020304" pitchFamily="18" charset="0"/>
+                <a:cs typeface="Times New Roman" panose="02020603050405020304" pitchFamily="18" charset="0"/>
+              </a:rPr>
+              <a:t>THE</a:t>
+            </a:r>
+            <a:r>
+              <a:rPr sz="1400" b="1" dirty="0">
+                <a:solidFill>
+                  <a:srgbClr val="8A7327"/>
+                </a:solidFill>
+                <a:latin typeface="Times New Roman" panose="02020603050405020304" pitchFamily="18" charset="0"/>
+                <a:cs typeface="Times New Roman" panose="02020603050405020304" pitchFamily="18" charset="0"/>
+              </a:rPr>
+              <a:t>  </a:t>
+            </a:r>
+            <a:r>
+              <a:rPr sz="1600" b="1" dirty="0">
+                <a:solidFill>
+                  <a:srgbClr val="004B9E"/>
+                </a:solidFill>
+                <a:latin typeface="Times New Roman" panose="02020603050405020304" pitchFamily="18" charset="0"/>
+                <a:cs typeface="Times New Roman" panose="02020603050405020304" pitchFamily="18" charset="0"/>
+              </a:rPr>
+              <a:t>MAPPING</a:t>
+            </a:r>
+          </a:p>
+        </p:txBody>
+      </p:sp>
+      <p:sp>
+        <p:nvSpPr>
+          <p:cNvPr id="40" name="TextBox 39"/>
+          <p:cNvSpPr txBox="1"/>
+          <p:nvPr/>
+        </p:nvSpPr>
+        <p:spPr>
+          <a:xfrm>
+            <a:off x="48127" y="7048210"/>
+            <a:ext cx="2486300" cy="531777"/>
+          </a:xfrm>
+          <a:prstGeom prst="flowChartAlternateProcess">
+            <a:avLst/>
+          </a:prstGeom>
+          <a:solidFill>
+            <a:schemeClr val="bg2"/>
+          </a:solidFill>
+          <a:ln w="28575">
+            <a:solidFill>
+              <a:schemeClr val="tx1"/>
+            </a:solidFill>
+          </a:ln>
+        </p:spPr>
+        <p:txBody>
+          <a:bodyPr wrap="square" lIns="18288" tIns="18288" rIns="18288" bIns="18288" anchor="ctr">
+            <a:spAutoFit/>
+          </a:bodyPr>
+          <a:lstStyle/>
+          <a:p>
+            <a:pPr algn="ctr">
+              <a:spcBef>
+                <a:spcPts val="0"/>
+              </a:spcBef>
+              <a:spcAft>
+                <a:spcPts val="100"/>
+              </a:spcAft>
+            </a:pPr>
+            <a:r>
+              <a:rPr sz="1400" b="1" dirty="0">
+                <a:latin typeface="Times New Roman" panose="02020603050405020304" pitchFamily="18" charset="0"/>
+                <a:cs typeface="Times New Roman" panose="02020603050405020304" pitchFamily="18" charset="0"/>
+              </a:rPr>
+              <a:t>HCI Literature</a:t>
+            </a:r>
+          </a:p>
+          <a:p>
+            <a:pPr algn="ctr">
+              <a:spcBef>
+                <a:spcPts val="0"/>
+              </a:spcBef>
+              <a:spcAft>
+                <a:spcPts val="100"/>
+              </a:spcAft>
+            </a:pPr>
+            <a:r>
+              <a:rPr sz="1400" b="0" dirty="0">
+                <a:latin typeface="Times New Roman" panose="02020603050405020304" pitchFamily="18" charset="0"/>
+                <a:cs typeface="Times New Roman" panose="02020603050405020304" pitchFamily="18" charset="0"/>
+              </a:rPr>
+              <a:t>Usability </a:t>
+            </a:r>
+            <a:r>
+              <a:rPr lang="en-US" sz="1400" b="0" dirty="0">
+                <a:latin typeface="Times New Roman" panose="02020603050405020304" pitchFamily="18" charset="0"/>
+                <a:cs typeface="Times New Roman" panose="02020603050405020304" pitchFamily="18" charset="0"/>
+              </a:rPr>
+              <a:t>·</a:t>
+            </a:r>
+            <a:r>
+              <a:rPr sz="1400" b="0" dirty="0">
+                <a:latin typeface="Times New Roman" panose="02020603050405020304" pitchFamily="18" charset="0"/>
+                <a:cs typeface="Times New Roman" panose="02020603050405020304" pitchFamily="18" charset="0"/>
+              </a:rPr>
+              <a:t> Accessibility </a:t>
+            </a:r>
+            <a:r>
+              <a:rPr lang="en-US" sz="1400" b="0" dirty="0">
+                <a:latin typeface="Times New Roman" panose="02020603050405020304" pitchFamily="18" charset="0"/>
+                <a:cs typeface="Times New Roman" panose="02020603050405020304" pitchFamily="18" charset="0"/>
+              </a:rPr>
+              <a:t>·</a:t>
+            </a:r>
+            <a:r>
+              <a:rPr sz="1400" b="0" dirty="0">
+                <a:latin typeface="Times New Roman" panose="02020603050405020304" pitchFamily="18" charset="0"/>
+                <a:cs typeface="Times New Roman" panose="02020603050405020304" pitchFamily="18" charset="0"/>
+              </a:rPr>
+              <a:t> UI/UX</a:t>
+            </a:r>
+          </a:p>
+        </p:txBody>
+      </p:sp>
+      <p:sp>
+        <p:nvSpPr>
+          <p:cNvPr id="41" name="TextBox 40"/>
+          <p:cNvSpPr txBox="1"/>
+          <p:nvPr/>
+        </p:nvSpPr>
+        <p:spPr>
+          <a:xfrm>
+            <a:off x="2591537" y="7062594"/>
+            <a:ext cx="2346901" cy="531777"/>
+          </a:xfrm>
+          <a:prstGeom prst="flowChartAlternateProcess">
+            <a:avLst/>
+          </a:prstGeom>
+          <a:solidFill>
+            <a:schemeClr val="bg2"/>
+          </a:solidFill>
+          <a:ln w="28575">
+            <a:solidFill>
+              <a:schemeClr val="tx1"/>
+            </a:solidFill>
+          </a:ln>
+        </p:spPr>
+        <p:txBody>
+          <a:bodyPr wrap="square" lIns="18288" tIns="18288" rIns="18288" bIns="18288" anchor="ctr">
+            <a:spAutoFit/>
+          </a:bodyPr>
+          <a:lstStyle/>
+          <a:p>
+            <a:pPr algn="ctr">
+              <a:spcBef>
+                <a:spcPts val="0"/>
+              </a:spcBef>
+              <a:spcAft>
+                <a:spcPts val="100"/>
+              </a:spcAft>
+            </a:pPr>
+            <a:r>
+              <a:rPr sz="1400" b="1" dirty="0">
+                <a:latin typeface="Times New Roman" panose="02020603050405020304" pitchFamily="18" charset="0"/>
+                <a:cs typeface="Times New Roman" panose="02020603050405020304" pitchFamily="18" charset="0"/>
+              </a:rPr>
+              <a:t>Accessibility Standards</a:t>
+            </a:r>
+          </a:p>
+          <a:p>
+            <a:pPr algn="ctr">
+              <a:spcBef>
+                <a:spcPts val="0"/>
+              </a:spcBef>
+              <a:spcAft>
+                <a:spcPts val="100"/>
+              </a:spcAft>
+            </a:pPr>
+            <a:r>
+              <a:rPr sz="1400" b="0" dirty="0">
+                <a:latin typeface="Times New Roman" panose="02020603050405020304" pitchFamily="18" charset="0"/>
+                <a:cs typeface="Times New Roman" panose="02020603050405020304" pitchFamily="18" charset="0"/>
+              </a:rPr>
+              <a:t>WCAG 2.1 AA </a:t>
+            </a:r>
+            <a:r>
+              <a:rPr lang="en-US" sz="1400" b="0" dirty="0">
+                <a:latin typeface="Times New Roman" panose="02020603050405020304" pitchFamily="18" charset="0"/>
+                <a:cs typeface="Times New Roman" panose="02020603050405020304" pitchFamily="18" charset="0"/>
+              </a:rPr>
+              <a:t>·</a:t>
+            </a:r>
+            <a:r>
+              <a:rPr sz="1400" b="0" dirty="0">
+                <a:latin typeface="Times New Roman" panose="02020603050405020304" pitchFamily="18" charset="0"/>
+                <a:cs typeface="Times New Roman" panose="02020603050405020304" pitchFamily="18" charset="0"/>
+              </a:rPr>
+              <a:t> EN 301 549</a:t>
+            </a:r>
+          </a:p>
+        </p:txBody>
+      </p:sp>
+      <p:sp>
+        <p:nvSpPr>
+          <p:cNvPr id="42" name="TextBox 41"/>
+          <p:cNvSpPr txBox="1"/>
+          <p:nvPr/>
+        </p:nvSpPr>
+        <p:spPr>
+          <a:xfrm>
+            <a:off x="5002607" y="7056747"/>
+            <a:ext cx="2346901" cy="531777"/>
+          </a:xfrm>
+          <a:prstGeom prst="flowChartAlternateProcess">
+            <a:avLst/>
+          </a:prstGeom>
+          <a:solidFill>
+            <a:schemeClr val="bg2"/>
+          </a:solidFill>
+          <a:ln w="28575">
+            <a:solidFill>
+              <a:schemeClr val="tx1"/>
+            </a:solidFill>
+          </a:ln>
+        </p:spPr>
+        <p:txBody>
+          <a:bodyPr wrap="square" lIns="18288" tIns="18288" rIns="18288" bIns="18288" anchor="ctr">
+            <a:spAutoFit/>
+          </a:bodyPr>
+          <a:lstStyle/>
+          <a:p>
+            <a:pPr algn="ctr">
+              <a:spcBef>
+                <a:spcPts val="0"/>
+              </a:spcBef>
+              <a:spcAft>
+                <a:spcPts val="100"/>
+              </a:spcAft>
+            </a:pPr>
+            <a:r>
+              <a:rPr sz="1400" b="1" dirty="0">
+                <a:latin typeface="Times New Roman" panose="02020603050405020304" pitchFamily="18" charset="0"/>
+                <a:cs typeface="Times New Roman" panose="02020603050405020304" pitchFamily="18" charset="0"/>
+              </a:rPr>
+              <a:t>Regulatory Frameworks</a:t>
+            </a:r>
+          </a:p>
+          <a:p>
+            <a:pPr algn="ctr">
+              <a:spcBef>
+                <a:spcPts val="0"/>
+              </a:spcBef>
+              <a:spcAft>
+                <a:spcPts val="100"/>
+              </a:spcAft>
+            </a:pPr>
+            <a:r>
+              <a:rPr sz="1400" b="0" dirty="0">
+                <a:latin typeface="Times New Roman" panose="02020603050405020304" pitchFamily="18" charset="0"/>
+                <a:cs typeface="Times New Roman" panose="02020603050405020304" pitchFamily="18" charset="0"/>
+              </a:rPr>
+              <a:t>GDPR </a:t>
+            </a:r>
+            <a:r>
+              <a:rPr lang="en-US" sz="1400" b="0" dirty="0">
+                <a:latin typeface="Times New Roman" panose="02020603050405020304" pitchFamily="18" charset="0"/>
+                <a:cs typeface="Times New Roman" panose="02020603050405020304" pitchFamily="18" charset="0"/>
+              </a:rPr>
+              <a:t>·</a:t>
+            </a:r>
+            <a:r>
+              <a:rPr sz="1400" b="0" dirty="0">
+                <a:latin typeface="Times New Roman" panose="02020603050405020304" pitchFamily="18" charset="0"/>
+                <a:cs typeface="Times New Roman" panose="02020603050405020304" pitchFamily="18" charset="0"/>
+              </a:rPr>
+              <a:t> HIPAA</a:t>
+            </a:r>
+          </a:p>
+        </p:txBody>
+      </p:sp>
+      <p:sp>
+        <p:nvSpPr>
+          <p:cNvPr id="43" name="TextBox 42"/>
+          <p:cNvSpPr txBox="1"/>
+          <p:nvPr/>
+        </p:nvSpPr>
+        <p:spPr>
+          <a:xfrm>
+            <a:off x="7408861" y="7056747"/>
+            <a:ext cx="2346901" cy="531777"/>
+          </a:xfrm>
+          <a:prstGeom prst="flowChartAlternateProcess">
+            <a:avLst/>
+          </a:prstGeom>
+          <a:solidFill>
+            <a:schemeClr val="bg2"/>
+          </a:solidFill>
+          <a:ln w="28575">
+            <a:solidFill>
+              <a:schemeClr val="tx1"/>
+            </a:solidFill>
+          </a:ln>
+        </p:spPr>
+        <p:txBody>
+          <a:bodyPr wrap="square" lIns="18288" tIns="18288" rIns="18288" bIns="18288" anchor="ctr">
+            <a:spAutoFit/>
+          </a:bodyPr>
+          <a:lstStyle/>
+          <a:p>
+            <a:pPr algn="ctr">
+              <a:spcBef>
+                <a:spcPts val="0"/>
+              </a:spcBef>
+              <a:spcAft>
+                <a:spcPts val="100"/>
+              </a:spcAft>
+            </a:pPr>
+            <a:r>
+              <a:rPr sz="1400" b="1" dirty="0">
+                <a:latin typeface="Times New Roman" panose="02020603050405020304" pitchFamily="18" charset="0"/>
+                <a:cs typeface="Times New Roman" panose="02020603050405020304" pitchFamily="18" charset="0"/>
+              </a:rPr>
+              <a:t>Usability Heuristics</a:t>
+            </a:r>
+          </a:p>
+          <a:p>
+            <a:pPr algn="ctr">
+              <a:spcBef>
+                <a:spcPts val="0"/>
+              </a:spcBef>
+              <a:spcAft>
+                <a:spcPts val="100"/>
+              </a:spcAft>
+            </a:pPr>
+            <a:r>
+              <a:rPr sz="1400" b="0" dirty="0">
+                <a:latin typeface="Times New Roman" panose="02020603050405020304" pitchFamily="18" charset="0"/>
+                <a:cs typeface="Times New Roman" panose="02020603050405020304" pitchFamily="18" charset="0"/>
+              </a:rPr>
+              <a:t>Nielsen’s 10 Heuristics</a:t>
+            </a:r>
+          </a:p>
+        </p:txBody>
+      </p:sp>
+      <p:sp>
+        <p:nvSpPr>
+          <p:cNvPr id="44" name="TextBox 43"/>
+          <p:cNvSpPr txBox="1"/>
+          <p:nvPr/>
+        </p:nvSpPr>
+        <p:spPr>
+          <a:xfrm>
+            <a:off x="9847199" y="7035493"/>
+            <a:ext cx="2183122" cy="531777"/>
+          </a:xfrm>
+          <a:prstGeom prst="flowChartAlternateProcess">
+            <a:avLst/>
+          </a:prstGeom>
+          <a:solidFill>
+            <a:schemeClr val="bg2"/>
+          </a:solidFill>
+          <a:ln w="28575">
+            <a:solidFill>
+              <a:schemeClr val="tx1"/>
+            </a:solidFill>
+          </a:ln>
+        </p:spPr>
+        <p:txBody>
+          <a:bodyPr wrap="square" lIns="18288" tIns="18288" rIns="18288" bIns="18288" anchor="ctr">
+            <a:spAutoFit/>
+          </a:bodyPr>
+          <a:lstStyle/>
+          <a:p>
+            <a:pPr algn="ctr">
+              <a:spcBef>
+                <a:spcPts val="0"/>
+              </a:spcBef>
+              <a:spcAft>
+                <a:spcPts val="100"/>
+              </a:spcAft>
+            </a:pPr>
+            <a:r>
+              <a:rPr sz="1400" b="1" dirty="0" err="1">
+                <a:latin typeface="Times New Roman" panose="02020603050405020304" pitchFamily="18" charset="0"/>
+                <a:cs typeface="Times New Roman" panose="02020603050405020304" pitchFamily="18" charset="0"/>
+              </a:rPr>
+              <a:t>PwD</a:t>
+            </a:r>
+            <a:r>
+              <a:rPr lang="en-US" sz="1400" b="1" dirty="0">
+                <a:latin typeface="Times New Roman" panose="02020603050405020304" pitchFamily="18" charset="0"/>
+                <a:cs typeface="Times New Roman" panose="02020603050405020304" pitchFamily="18" charset="0"/>
+              </a:rPr>
+              <a:t> </a:t>
+            </a:r>
+            <a:r>
+              <a:rPr sz="1400" b="1" dirty="0">
+                <a:latin typeface="Times New Roman" panose="02020603050405020304" pitchFamily="18" charset="0"/>
+                <a:cs typeface="Times New Roman" panose="02020603050405020304" pitchFamily="18" charset="0"/>
+              </a:rPr>
+              <a:t>Centered Design</a:t>
+            </a:r>
+          </a:p>
+          <a:p>
+            <a:pPr algn="ctr">
+              <a:spcBef>
+                <a:spcPts val="0"/>
+              </a:spcBef>
+              <a:spcAft>
+                <a:spcPts val="100"/>
+              </a:spcAft>
+            </a:pPr>
+            <a:r>
+              <a:rPr sz="1400" b="0" dirty="0">
+                <a:latin typeface="Times New Roman" panose="02020603050405020304" pitchFamily="18" charset="0"/>
+                <a:cs typeface="Times New Roman" panose="02020603050405020304" pitchFamily="18" charset="0"/>
+              </a:rPr>
+              <a:t>Needs </a:t>
+            </a:r>
+            <a:r>
+              <a:rPr lang="en-US" sz="1400" b="0" dirty="0">
+                <a:latin typeface="Times New Roman" panose="02020603050405020304" pitchFamily="18" charset="0"/>
+                <a:cs typeface="Times New Roman" panose="02020603050405020304" pitchFamily="18" charset="0"/>
+              </a:rPr>
+              <a:t>·</a:t>
+            </a:r>
+            <a:r>
+              <a:rPr sz="1400" b="0" dirty="0">
+                <a:latin typeface="Times New Roman" panose="02020603050405020304" pitchFamily="18" charset="0"/>
+                <a:cs typeface="Times New Roman" panose="02020603050405020304" pitchFamily="18" charset="0"/>
+              </a:rPr>
+              <a:t> Context · Inclusion</a:t>
+            </a:r>
+          </a:p>
+        </p:txBody>
+      </p:sp>
+      <p:sp>
+        <p:nvSpPr>
+          <p:cNvPr id="56" name="Right Arrow 11">
+            <a:extLst>
+              <a:ext uri="{FF2B5EF4-FFF2-40B4-BE49-F238E27FC236}">
+                <a16:creationId xmlns:a16="http://schemas.microsoft.com/office/drawing/2014/main" id="{11CC4910-8C48-ABFB-A058-BAA5AB69DD38}"/>
+              </a:ext>
+            </a:extLst>
+          </p:cNvPr>
+          <p:cNvSpPr/>
+          <p:nvPr/>
+        </p:nvSpPr>
+        <p:spPr>
+          <a:xfrm>
+            <a:off x="3113720" y="1435329"/>
+            <a:ext cx="184225" cy="121916"/>
+          </a:xfrm>
+          <a:prstGeom prst="rightArrow">
+            <a:avLst>
+              <a:gd name="adj1" fmla="val 55000"/>
+              <a:gd name="adj2" fmla="val 55000"/>
+            </a:avLst>
+          </a:prstGeom>
+          <a:ln w="28575">
+            <a:solidFill>
+              <a:schemeClr val="tx1"/>
+            </a:solidFill>
+          </a:ln>
+        </p:spPr>
+        <p:style>
+          <a:lnRef idx="2">
+            <a:schemeClr val="dk1">
+              <a:shade val="15000"/>
+            </a:schemeClr>
+          </a:lnRef>
+          <a:fillRef idx="1">
+            <a:schemeClr val="dk1"/>
+          </a:fillRef>
+          <a:effectRef idx="0">
+            <a:schemeClr val="dk1"/>
+          </a:effectRef>
+          <a:fontRef idx="minor">
+            <a:schemeClr val="lt1"/>
+          </a:fontRef>
+        </p:style>
+        <p:txBody>
+          <a:bodyPr rtlCol="0" anchor="ctr"/>
+          <a:lstStyle/>
+          <a:p>
+            <a:pPr algn="ctr"/>
+            <a:endParaRPr sz="1400">
+              <a:latin typeface="Times New Roman" panose="02020603050405020304" pitchFamily="18" charset="0"/>
+              <a:cs typeface="Times New Roman" panose="02020603050405020304" pitchFamily="18" charset="0"/>
+            </a:endParaRPr>
+          </a:p>
+        </p:txBody>
+      </p:sp>
+      <p:sp>
+        <p:nvSpPr>
+          <p:cNvPr id="57" name="Right Arrow 19">
+            <a:extLst>
+              <a:ext uri="{FF2B5EF4-FFF2-40B4-BE49-F238E27FC236}">
+                <a16:creationId xmlns:a16="http://schemas.microsoft.com/office/drawing/2014/main" id="{FB53FE3C-BD1B-8CAD-3E52-743617771F29}"/>
+              </a:ext>
+            </a:extLst>
+          </p:cNvPr>
+          <p:cNvSpPr/>
+          <p:nvPr/>
+        </p:nvSpPr>
+        <p:spPr>
+          <a:xfrm>
+            <a:off x="3113720" y="2609036"/>
+            <a:ext cx="184225" cy="121916"/>
+          </a:xfrm>
+          <a:prstGeom prst="rightArrow">
+            <a:avLst>
+              <a:gd name="adj1" fmla="val 55000"/>
+              <a:gd name="adj2" fmla="val 55000"/>
+            </a:avLst>
+          </a:prstGeom>
+          <a:ln w="28575">
+            <a:solidFill>
+              <a:schemeClr val="tx1"/>
+            </a:solidFill>
+          </a:ln>
+        </p:spPr>
+        <p:style>
+          <a:lnRef idx="2">
+            <a:schemeClr val="dk1">
+              <a:shade val="15000"/>
+            </a:schemeClr>
+          </a:lnRef>
+          <a:fillRef idx="1">
+            <a:schemeClr val="dk1"/>
+          </a:fillRef>
+          <a:effectRef idx="0">
+            <a:schemeClr val="dk1"/>
+          </a:effectRef>
+          <a:fontRef idx="minor">
+            <a:schemeClr val="lt1"/>
+          </a:fontRef>
+        </p:style>
+        <p:txBody>
+          <a:bodyPr rtlCol="0" anchor="ctr"/>
+          <a:lstStyle/>
+          <a:p>
+            <a:pPr algn="ctr"/>
+            <a:endParaRPr sz="1400">
+              <a:latin typeface="Times New Roman" panose="02020603050405020304" pitchFamily="18" charset="0"/>
+              <a:cs typeface="Times New Roman" panose="02020603050405020304" pitchFamily="18" charset="0"/>
+            </a:endParaRPr>
+          </a:p>
+        </p:txBody>
+      </p:sp>
+      <p:sp>
+        <p:nvSpPr>
+          <p:cNvPr id="58" name="Right Arrow 27">
+            <a:extLst>
+              <a:ext uri="{FF2B5EF4-FFF2-40B4-BE49-F238E27FC236}">
+                <a16:creationId xmlns:a16="http://schemas.microsoft.com/office/drawing/2014/main" id="{25949C95-ACB6-F391-F53F-D9568EA2CB94}"/>
+              </a:ext>
+            </a:extLst>
+          </p:cNvPr>
+          <p:cNvSpPr/>
+          <p:nvPr/>
+        </p:nvSpPr>
+        <p:spPr>
+          <a:xfrm>
+            <a:off x="3113720" y="3759692"/>
+            <a:ext cx="184225" cy="121916"/>
+          </a:xfrm>
+          <a:prstGeom prst="rightArrow">
+            <a:avLst>
+              <a:gd name="adj1" fmla="val 55000"/>
+              <a:gd name="adj2" fmla="val 55000"/>
+            </a:avLst>
+          </a:prstGeom>
+          <a:ln w="28575">
+            <a:solidFill>
+              <a:schemeClr val="tx1"/>
+            </a:solidFill>
+          </a:ln>
+        </p:spPr>
+        <p:style>
+          <a:lnRef idx="2">
+            <a:schemeClr val="dk1">
+              <a:shade val="15000"/>
+            </a:schemeClr>
+          </a:lnRef>
+          <a:fillRef idx="1">
+            <a:schemeClr val="dk1"/>
+          </a:fillRef>
+          <a:effectRef idx="0">
+            <a:schemeClr val="dk1"/>
+          </a:effectRef>
+          <a:fontRef idx="minor">
+            <a:schemeClr val="lt1"/>
+          </a:fontRef>
+        </p:style>
+        <p:txBody>
+          <a:bodyPr rtlCol="0" anchor="ctr"/>
+          <a:lstStyle/>
+          <a:p>
+            <a:pPr algn="ctr"/>
+            <a:endParaRPr sz="1400">
+              <a:latin typeface="Times New Roman" panose="02020603050405020304" pitchFamily="18" charset="0"/>
+              <a:cs typeface="Times New Roman" panose="02020603050405020304" pitchFamily="18" charset="0"/>
+            </a:endParaRPr>
+          </a:p>
+        </p:txBody>
+      </p:sp>
+      <p:sp>
+        <p:nvSpPr>
+          <p:cNvPr id="59" name="Right Arrow 35">
+            <a:extLst>
+              <a:ext uri="{FF2B5EF4-FFF2-40B4-BE49-F238E27FC236}">
+                <a16:creationId xmlns:a16="http://schemas.microsoft.com/office/drawing/2014/main" id="{4AB25075-3CDD-E165-F7E3-1D7164486D1F}"/>
+              </a:ext>
+            </a:extLst>
+          </p:cNvPr>
+          <p:cNvSpPr/>
+          <p:nvPr/>
+        </p:nvSpPr>
+        <p:spPr>
+          <a:xfrm>
+            <a:off x="3113720" y="5048659"/>
+            <a:ext cx="184225" cy="121916"/>
+          </a:xfrm>
+          <a:prstGeom prst="rightArrow">
+            <a:avLst>
+              <a:gd name="adj1" fmla="val 55000"/>
+              <a:gd name="adj2" fmla="val 55000"/>
+            </a:avLst>
+          </a:prstGeom>
+          <a:ln w="28575">
+            <a:solidFill>
+              <a:schemeClr val="tx1"/>
+            </a:solidFill>
+          </a:ln>
+        </p:spPr>
+        <p:style>
+          <a:lnRef idx="2">
+            <a:schemeClr val="dk1">
+              <a:shade val="15000"/>
+            </a:schemeClr>
+          </a:lnRef>
+          <a:fillRef idx="1">
+            <a:schemeClr val="dk1"/>
+          </a:fillRef>
+          <a:effectRef idx="0">
+            <a:schemeClr val="dk1"/>
+          </a:effectRef>
+          <a:fontRef idx="minor">
+            <a:schemeClr val="lt1"/>
+          </a:fontRef>
+        </p:style>
+        <p:txBody>
+          <a:bodyPr rtlCol="0" anchor="ctr"/>
+          <a:lstStyle/>
+          <a:p>
+            <a:pPr algn="ctr"/>
+            <a:endParaRPr sz="1400">
+              <a:latin typeface="Times New Roman" panose="02020603050405020304" pitchFamily="18" charset="0"/>
+              <a:cs typeface="Times New Roman" panose="02020603050405020304" pitchFamily="18" charset="0"/>
+            </a:endParaRPr>
+          </a:p>
+        </p:txBody>
+      </p:sp>
+      <p:sp>
+        <p:nvSpPr>
+          <p:cNvPr id="61" name="Right Arrow 11">
+            <a:extLst>
+              <a:ext uri="{FF2B5EF4-FFF2-40B4-BE49-F238E27FC236}">
+                <a16:creationId xmlns:a16="http://schemas.microsoft.com/office/drawing/2014/main" id="{C4F5F762-A39A-BA7C-60E3-E50998FE3A84}"/>
+              </a:ext>
+            </a:extLst>
+          </p:cNvPr>
+          <p:cNvSpPr/>
+          <p:nvPr/>
+        </p:nvSpPr>
+        <p:spPr>
+          <a:xfrm>
+            <a:off x="9060005" y="1466065"/>
+            <a:ext cx="204770" cy="121916"/>
+          </a:xfrm>
+          <a:prstGeom prst="rightArrow">
+            <a:avLst>
+              <a:gd name="adj1" fmla="val 55000"/>
+              <a:gd name="adj2" fmla="val 55000"/>
+            </a:avLst>
+          </a:prstGeom>
+          <a:ln w="28575">
+            <a:solidFill>
+              <a:schemeClr val="tx1"/>
+            </a:solidFill>
+          </a:ln>
+        </p:spPr>
+        <p:style>
+          <a:lnRef idx="2">
+            <a:schemeClr val="dk1">
+              <a:shade val="15000"/>
+            </a:schemeClr>
+          </a:lnRef>
+          <a:fillRef idx="1">
+            <a:schemeClr val="dk1"/>
+          </a:fillRef>
+          <a:effectRef idx="0">
+            <a:schemeClr val="dk1"/>
+          </a:effectRef>
+          <a:fontRef idx="minor">
+            <a:schemeClr val="lt1"/>
+          </a:fontRef>
+        </p:style>
+        <p:txBody>
+          <a:bodyPr rtlCol="0" anchor="ctr"/>
+          <a:lstStyle/>
+          <a:p>
+            <a:pPr algn="ctr"/>
+            <a:endParaRPr sz="1400">
+              <a:latin typeface="Times New Roman" panose="02020603050405020304" pitchFamily="18" charset="0"/>
+              <a:cs typeface="Times New Roman" panose="02020603050405020304" pitchFamily="18" charset="0"/>
+            </a:endParaRPr>
+          </a:p>
+        </p:txBody>
+      </p:sp>
+      <p:sp>
+        <p:nvSpPr>
+          <p:cNvPr id="62" name="Right Arrow 19">
+            <a:extLst>
+              <a:ext uri="{FF2B5EF4-FFF2-40B4-BE49-F238E27FC236}">
+                <a16:creationId xmlns:a16="http://schemas.microsoft.com/office/drawing/2014/main" id="{C29AAD73-8955-6D31-BE93-7F3BBBA25CB9}"/>
+              </a:ext>
+            </a:extLst>
+          </p:cNvPr>
+          <p:cNvSpPr/>
+          <p:nvPr/>
+        </p:nvSpPr>
+        <p:spPr>
+          <a:xfrm>
+            <a:off x="9060005" y="2609036"/>
+            <a:ext cx="204770" cy="121916"/>
+          </a:xfrm>
+          <a:prstGeom prst="rightArrow">
+            <a:avLst>
+              <a:gd name="adj1" fmla="val 55000"/>
+              <a:gd name="adj2" fmla="val 55000"/>
+            </a:avLst>
+          </a:prstGeom>
+          <a:ln w="28575">
+            <a:solidFill>
+              <a:schemeClr val="tx1"/>
+            </a:solidFill>
+          </a:ln>
+        </p:spPr>
+        <p:style>
+          <a:lnRef idx="2">
+            <a:schemeClr val="dk1">
+              <a:shade val="15000"/>
+            </a:schemeClr>
+          </a:lnRef>
+          <a:fillRef idx="1">
+            <a:schemeClr val="dk1"/>
+          </a:fillRef>
+          <a:effectRef idx="0">
+            <a:schemeClr val="dk1"/>
+          </a:effectRef>
+          <a:fontRef idx="minor">
+            <a:schemeClr val="lt1"/>
+          </a:fontRef>
+        </p:style>
+        <p:txBody>
+          <a:bodyPr rtlCol="0" anchor="ctr"/>
+          <a:lstStyle/>
+          <a:p>
+            <a:pPr algn="ctr"/>
+            <a:endParaRPr sz="1400">
+              <a:latin typeface="Times New Roman" panose="02020603050405020304" pitchFamily="18" charset="0"/>
+              <a:cs typeface="Times New Roman" panose="02020603050405020304" pitchFamily="18" charset="0"/>
+            </a:endParaRPr>
+          </a:p>
+        </p:txBody>
+      </p:sp>
+      <p:sp>
+        <p:nvSpPr>
+          <p:cNvPr id="63" name="Right Arrow 27">
+            <a:extLst>
+              <a:ext uri="{FF2B5EF4-FFF2-40B4-BE49-F238E27FC236}">
+                <a16:creationId xmlns:a16="http://schemas.microsoft.com/office/drawing/2014/main" id="{F9B2EAB5-4469-1817-5D7F-B427D9FBD056}"/>
+              </a:ext>
+            </a:extLst>
+          </p:cNvPr>
+          <p:cNvSpPr/>
+          <p:nvPr/>
+        </p:nvSpPr>
+        <p:spPr>
+          <a:xfrm>
+            <a:off x="9060005" y="3752008"/>
+            <a:ext cx="204770" cy="121916"/>
+          </a:xfrm>
+          <a:prstGeom prst="rightArrow">
+            <a:avLst>
+              <a:gd name="adj1" fmla="val 55000"/>
+              <a:gd name="adj2" fmla="val 55000"/>
+            </a:avLst>
+          </a:prstGeom>
+          <a:ln w="28575">
+            <a:solidFill>
+              <a:schemeClr val="tx1"/>
+            </a:solidFill>
+          </a:ln>
+        </p:spPr>
+        <p:style>
+          <a:lnRef idx="2">
+            <a:schemeClr val="dk1">
+              <a:shade val="15000"/>
+            </a:schemeClr>
+          </a:lnRef>
+          <a:fillRef idx="1">
+            <a:schemeClr val="dk1"/>
+          </a:fillRef>
+          <a:effectRef idx="0">
+            <a:schemeClr val="dk1"/>
+          </a:effectRef>
+          <a:fontRef idx="minor">
+            <a:schemeClr val="lt1"/>
+          </a:fontRef>
+        </p:style>
+        <p:txBody>
+          <a:bodyPr rtlCol="0" anchor="ctr"/>
+          <a:lstStyle/>
+          <a:p>
+            <a:pPr algn="ctr"/>
+            <a:endParaRPr sz="1400">
+              <a:latin typeface="Times New Roman" panose="02020603050405020304" pitchFamily="18" charset="0"/>
+              <a:cs typeface="Times New Roman" panose="02020603050405020304" pitchFamily="18" charset="0"/>
+            </a:endParaRPr>
+          </a:p>
+        </p:txBody>
+      </p:sp>
+      <p:sp>
+        <p:nvSpPr>
+          <p:cNvPr id="64" name="Right Arrow 35">
+            <a:extLst>
+              <a:ext uri="{FF2B5EF4-FFF2-40B4-BE49-F238E27FC236}">
+                <a16:creationId xmlns:a16="http://schemas.microsoft.com/office/drawing/2014/main" id="{FA830FB8-11D1-E6A5-D0B2-DC1EE280A9D7}"/>
+              </a:ext>
+            </a:extLst>
+          </p:cNvPr>
+          <p:cNvSpPr/>
+          <p:nvPr/>
+        </p:nvSpPr>
+        <p:spPr>
+          <a:xfrm>
+            <a:off x="9060005" y="5014622"/>
+            <a:ext cx="204770" cy="121916"/>
+          </a:xfrm>
+          <a:prstGeom prst="rightArrow">
+            <a:avLst>
+              <a:gd name="adj1" fmla="val 55000"/>
+              <a:gd name="adj2" fmla="val 55000"/>
+            </a:avLst>
+          </a:prstGeom>
+          <a:ln w="28575">
+            <a:solidFill>
+              <a:schemeClr val="tx1"/>
+            </a:solidFill>
+          </a:ln>
+        </p:spPr>
+        <p:style>
+          <a:lnRef idx="2">
+            <a:schemeClr val="dk1">
+              <a:shade val="15000"/>
+            </a:schemeClr>
+          </a:lnRef>
+          <a:fillRef idx="1">
+            <a:schemeClr val="dk1"/>
+          </a:fillRef>
+          <a:effectRef idx="0">
+            <a:schemeClr val="dk1"/>
+          </a:effectRef>
+          <a:fontRef idx="minor">
+            <a:schemeClr val="lt1"/>
+          </a:fontRef>
+        </p:style>
+        <p:txBody>
+          <a:bodyPr rtlCol="0" anchor="ctr"/>
+          <a:lstStyle/>
+          <a:p>
+            <a:pPr algn="ctr"/>
+            <a:endParaRPr sz="1400">
+              <a:latin typeface="Times New Roman" panose="02020603050405020304" pitchFamily="18" charset="0"/>
+              <a:cs typeface="Times New Roman" panose="02020603050405020304" pitchFamily="18" charset="0"/>
+            </a:endParaRPr>
+          </a:p>
+        </p:txBody>
+      </p:sp>
+      <p:sp>
+        <p:nvSpPr>
+          <p:cNvPr id="13" name="Right Arrow 35">
+            <a:extLst>
+              <a:ext uri="{FF2B5EF4-FFF2-40B4-BE49-F238E27FC236}">
+                <a16:creationId xmlns:a16="http://schemas.microsoft.com/office/drawing/2014/main" id="{B2F37785-A3A4-E1E3-14C9-7411AC88505F}"/>
+              </a:ext>
+            </a:extLst>
+          </p:cNvPr>
+          <p:cNvSpPr/>
+          <p:nvPr/>
+        </p:nvSpPr>
+        <p:spPr>
+          <a:xfrm>
+            <a:off x="6196275" y="3698734"/>
+            <a:ext cx="204770" cy="121916"/>
+          </a:xfrm>
+          <a:prstGeom prst="rightArrow">
+            <a:avLst>
+              <a:gd name="adj1" fmla="val 55000"/>
+              <a:gd name="adj2" fmla="val 55000"/>
+            </a:avLst>
+          </a:prstGeom>
+          <a:ln w="28575">
+            <a:solidFill>
+              <a:schemeClr val="tx1"/>
+            </a:solidFill>
+          </a:ln>
+        </p:spPr>
+        <p:style>
+          <a:lnRef idx="2">
+            <a:schemeClr val="dk1">
+              <a:shade val="15000"/>
+            </a:schemeClr>
+          </a:lnRef>
+          <a:fillRef idx="1">
+            <a:schemeClr val="dk1"/>
+          </a:fillRef>
+          <a:effectRef idx="0">
+            <a:schemeClr val="dk1"/>
+          </a:effectRef>
+          <a:fontRef idx="minor">
+            <a:schemeClr val="lt1"/>
+          </a:fontRef>
+        </p:style>
+        <p:txBody>
+          <a:bodyPr rtlCol="0" anchor="ctr"/>
+          <a:lstStyle/>
+          <a:p>
+            <a:pPr algn="ctr"/>
+            <a:endParaRPr sz="1400">
+              <a:latin typeface="Times New Roman" panose="02020603050405020304" pitchFamily="18" charset="0"/>
+              <a:cs typeface="Times New Roman" panose="02020603050405020304" pitchFamily="18" charset="0"/>
+            </a:endParaRPr>
+          </a:p>
+        </p:txBody>
+      </p:sp>
     </p:spTree>
   </p:cSld>
   <p:clrMapOvr>
